--- a/reports/肉酒場然_事業計画書_20260605.pptx
+++ b/reports/肉酒場然_事業計画書_20260605.pptx
@@ -25,6 +25,7 @@
     <p:sldId id="273" r:id="rId24"/>
     <p:sldId id="274" r:id="rId25"/>
     <p:sldId id="275" r:id="rId26"/>
+    <p:sldId id="276" r:id="rId27"/>
   </p:sldIdLst>
   <p:sldSz cx="12188952" cy="6858000" type="screen4x3"/>
   <p:notesSz cx="6858000" cy="9144000"/>
@@ -3400,7 +3401,7 @@
                   <a:srgbClr val="8A7A6A"/>
                 </a:solidFill>
               </a:rPr>
-              <a:t>1 / 20</a:t>
+              <a:t>1 / 21</a:t>
             </a:r>
           </a:p>
         </p:txBody>
@@ -4994,7 +4995,7 @@
                   <a:srgbClr val="8A7A6A"/>
                 </a:solidFill>
               </a:rPr>
-              <a:t>10 / 20</a:t>
+              <a:t>10 / 21</a:t>
             </a:r>
           </a:p>
         </p:txBody>
@@ -5972,7 +5973,7 @@
                   <a:srgbClr val="8A7A6A"/>
                 </a:solidFill>
               </a:rPr>
-              <a:t>11 / 20</a:t>
+              <a:t>11 / 21</a:t>
             </a:r>
           </a:p>
         </p:txBody>
@@ -8068,7 +8069,7 @@
                   <a:srgbClr val="8A7A6A"/>
                 </a:solidFill>
               </a:rPr>
-              <a:t>13 / 20</a:t>
+              <a:t>13 / 21</a:t>
             </a:r>
           </a:p>
         </p:txBody>
@@ -9753,7 +9754,7 @@
                   <a:srgbClr val="8A7A6A"/>
                 </a:solidFill>
               </a:rPr>
-              <a:t>14 / 20</a:t>
+              <a:t>14 / 21</a:t>
             </a:r>
           </a:p>
         </p:txBody>
@@ -11380,7 +11381,7 @@
                   <a:srgbClr val="8A7A6A"/>
                 </a:solidFill>
               </a:rPr>
-              <a:t>15 / 20</a:t>
+              <a:t>15 / 21</a:t>
             </a:r>
           </a:p>
         </p:txBody>
@@ -13309,7 +13310,7 @@
                   <a:srgbClr val="8A7A6A"/>
                 </a:solidFill>
               </a:rPr>
-              <a:t>16 / 20</a:t>
+              <a:t>16 / 21</a:t>
             </a:r>
           </a:p>
         </p:txBody>
@@ -14870,7 +14871,7 @@
                   <a:srgbClr val="8A7A6A"/>
                 </a:solidFill>
               </a:rPr>
-              <a:t>17 / 20</a:t>
+              <a:t>17 / 21</a:t>
             </a:r>
           </a:p>
         </p:txBody>
@@ -17404,7 +17405,7 @@
                   <a:srgbClr val="8A7A6A"/>
                 </a:solidFill>
               </a:rPr>
-              <a:t>18 / 20</a:t>
+              <a:t>18 / 21</a:t>
             </a:r>
           </a:p>
         </p:txBody>
@@ -17507,7 +17508,7 @@
                   <a:srgbClr val="C8963C"/>
                 </a:solidFill>
               </a:rPr>
-              <a:t>RISK MANAGEMENT</a:t>
+              <a:t>10-YEAR GROWTH</a:t>
             </a:r>
           </a:p>
         </p:txBody>
@@ -17541,7 +17542,7 @@
                   <a:srgbClr val="FFFFFF"/>
                 </a:solidFill>
               </a:rPr>
-              <a:t>リスクと対策　――　想定して備える</a:t>
+              <a:t>10年財務成長シナリオ</a:t>
             </a:r>
           </a:p>
         </p:txBody>
@@ -17598,13 +17599,13 @@
         <p:spPr>
           <a:xfrm>
             <a:off x="457200" y="1600200"/>
-            <a:ext cx="11247120" cy="859536"/>
+            <a:ext cx="2743200" cy="777240"/>
           </a:xfrm>
           <a:prstGeom prst="rect">
             <a:avLst/>
           </a:prstGeom>
           <a:solidFill>
-            <a:srgbClr val="2A1E12"/>
+            <a:srgbClr val="3A2A08"/>
           </a:solidFill>
           <a:ln>
             <a:noFill/>
@@ -17634,20 +17635,88 @@
       </p:sp>
       <p:sp>
         <p:nvSpPr>
-          <p:cNvPr id="7" name="Rectangle 6"/>
+          <p:cNvPr id="7" name="TextBox 6"/>
+          <p:cNvSpPr txBox="1"/>
+          <p:nvPr/>
+        </p:nvSpPr>
+        <p:spPr>
+          <a:xfrm>
+            <a:off x="548640" y="1645920"/>
+            <a:ext cx="2560320" cy="274320"/>
+          </a:xfrm>
+          <a:prstGeom prst="rect">
+            <a:avLst/>
+          </a:prstGeom>
+          <a:noFill/>
+        </p:spPr>
+        <p:txBody>
+          <a:bodyPr wrap="square">
+            <a:spAutoFit/>
+          </a:bodyPr>
+          <a:lstStyle/>
+          <a:p>
+            <a:pPr algn="ctr"/>
+            <a:r>
+              <a:rPr sz="1000" b="0" i="0">
+                <a:solidFill>
+                  <a:srgbClr val="8A7A6A"/>
+                </a:solidFill>
+              </a:rPr>
+              <a:t>7年目 店舗数</a:t>
+            </a:r>
+          </a:p>
+        </p:txBody>
+      </p:sp>
+      <p:sp>
+        <p:nvSpPr>
+          <p:cNvPr id="8" name="TextBox 7"/>
+          <p:cNvSpPr txBox="1"/>
+          <p:nvPr/>
+        </p:nvSpPr>
+        <p:spPr>
+          <a:xfrm>
+            <a:off x="548640" y="1920240"/>
+            <a:ext cx="2560320" cy="402336"/>
+          </a:xfrm>
+          <a:prstGeom prst="rect">
+            <a:avLst/>
+          </a:prstGeom>
+          <a:noFill/>
+        </p:spPr>
+        <p:txBody>
+          <a:bodyPr wrap="square">
+            <a:spAutoFit/>
+          </a:bodyPr>
+          <a:lstStyle/>
+          <a:p>
+            <a:pPr algn="ctr"/>
+            <a:r>
+              <a:rPr sz="1800" b="1" i="0">
+                <a:solidFill>
+                  <a:srgbClr val="C8963C"/>
+                </a:solidFill>
+              </a:rPr>
+              <a:t>100店舗</a:t>
+            </a:r>
+          </a:p>
+        </p:txBody>
+      </p:sp>
+      <p:sp>
+        <p:nvSpPr>
+          <p:cNvPr id="9" name="Rectangle 8"/>
           <p:cNvSpPr/>
           <p:nvPr/>
         </p:nvSpPr>
         <p:spPr>
           <a:xfrm>
-            <a:off x="457200" y="1600200"/>
-            <a:ext cx="457200" cy="859536"/>
+            <a:off x="3383280" y="1600200"/>
+            <a:ext cx="2743200" cy="777240"/>
           </a:xfrm>
           <a:prstGeom prst="rect">
             <a:avLst/>
           </a:prstGeom>
           <a:solidFill>
-            <a:srgbClr val="C0392B"/>
+            <a:srgbClr val="3A2A08"/>
           </a:solidFill>
           <a:ln>
             <a:noFill/>
@@ -17677,14 +17746,14 @@
       </p:sp>
       <p:sp>
         <p:nvSpPr>
-          <p:cNvPr id="8" name="TextBox 7"/>
-          <p:cNvSpPr txBox="1"/>
-          <p:nvPr/>
-        </p:nvSpPr>
-        <p:spPr>
-          <a:xfrm>
-            <a:off x="457200" y="1856232"/>
-            <a:ext cx="457200" cy="329184"/>
+          <p:cNvPr id="10" name="TextBox 9"/>
+          <p:cNvSpPr txBox="1"/>
+          <p:nvPr/>
+        </p:nvSpPr>
+        <p:spPr>
+          <a:xfrm>
+            <a:off x="3474720" y="1645920"/>
+            <a:ext cx="2560320" cy="274320"/>
           </a:xfrm>
           <a:prstGeom prst="rect">
             <a:avLst/>
@@ -17699,100 +17768,66 @@
           <a:p>
             <a:pPr algn="ctr"/>
             <a:r>
-              <a:rPr sz="1100" b="1" i="0">
-                <a:solidFill>
-                  <a:srgbClr val="1A120B"/>
-                </a:solidFill>
-              </a:rPr>
-              <a:t>高</a:t>
-            </a:r>
-          </a:p>
-        </p:txBody>
-      </p:sp>
-      <p:sp>
-        <p:nvSpPr>
-          <p:cNvPr id="9" name="TextBox 8"/>
-          <p:cNvSpPr txBox="1"/>
-          <p:nvPr/>
-        </p:nvSpPr>
-        <p:spPr>
-          <a:xfrm>
-            <a:off x="1005840" y="1645920"/>
-            <a:ext cx="2743200" cy="347472"/>
-          </a:xfrm>
-          <a:prstGeom prst="rect">
-            <a:avLst/>
-          </a:prstGeom>
-          <a:noFill/>
-        </p:spPr>
-        <p:txBody>
-          <a:bodyPr wrap="square">
-            <a:spAutoFit/>
-          </a:bodyPr>
-          <a:lstStyle/>
-          <a:p>
-            <a:pPr algn="l"/>
-            <a:r>
-              <a:rPr sz="1300" b="1" i="0">
-                <a:solidFill>
-                  <a:srgbClr val="FFFFFF"/>
-                </a:solidFill>
-              </a:rPr>
-              <a:t>① 立ち上げ期の売上未達</a:t>
-            </a:r>
-          </a:p>
-        </p:txBody>
-      </p:sp>
-      <p:sp>
-        <p:nvSpPr>
-          <p:cNvPr id="10" name="TextBox 9"/>
-          <p:cNvSpPr txBox="1"/>
-          <p:nvPr/>
-        </p:nvSpPr>
-        <p:spPr>
-          <a:xfrm>
-            <a:off x="1005840" y="2039112"/>
-            <a:ext cx="2743200" cy="347472"/>
-          </a:xfrm>
-          <a:prstGeom prst="rect">
-            <a:avLst/>
-          </a:prstGeom>
-          <a:noFill/>
-        </p:spPr>
-        <p:txBody>
-          <a:bodyPr wrap="square">
-            <a:spAutoFit/>
-          </a:bodyPr>
-          <a:lstStyle/>
-          <a:p>
-            <a:pPr algn="l"/>
-            <a:r>
-              <a:rPr sz="1100" b="0" i="1">
+              <a:rPr sz="1000" b="0" i="0">
                 <a:solidFill>
                   <a:srgbClr val="8A7A6A"/>
                 </a:solidFill>
               </a:rPr>
-              <a:t>新店認知不足・口コミ形成に時間</a:t>
-            </a:r>
-          </a:p>
-        </p:txBody>
-      </p:sp>
-      <p:sp>
-        <p:nvSpPr>
-          <p:cNvPr id="11" name="Rectangle 10"/>
+              <a:t>7年目 年商</a:t>
+            </a:r>
+          </a:p>
+        </p:txBody>
+      </p:sp>
+      <p:sp>
+        <p:nvSpPr>
+          <p:cNvPr id="11" name="TextBox 10"/>
+          <p:cNvSpPr txBox="1"/>
+          <p:nvPr/>
+        </p:nvSpPr>
+        <p:spPr>
+          <a:xfrm>
+            <a:off x="3474720" y="1920240"/>
+            <a:ext cx="2560320" cy="402336"/>
+          </a:xfrm>
+          <a:prstGeom prst="rect">
+            <a:avLst/>
+          </a:prstGeom>
+          <a:noFill/>
+        </p:spPr>
+        <p:txBody>
+          <a:bodyPr wrap="square">
+            <a:spAutoFit/>
+          </a:bodyPr>
+          <a:lstStyle/>
+          <a:p>
+            <a:pPr algn="ctr"/>
+            <a:r>
+              <a:rPr sz="1800" b="1" i="0">
+                <a:solidFill>
+                  <a:srgbClr val="C8963C"/>
+                </a:solidFill>
+              </a:rPr>
+              <a:t>86億円</a:t>
+            </a:r>
+          </a:p>
+        </p:txBody>
+      </p:sp>
+      <p:sp>
+        <p:nvSpPr>
+          <p:cNvPr id="12" name="Rectangle 11"/>
           <p:cNvSpPr/>
           <p:nvPr/>
         </p:nvSpPr>
         <p:spPr>
           <a:xfrm>
-            <a:off x="3931920" y="1673352"/>
-            <a:ext cx="457200" cy="256032"/>
+            <a:off x="6309360" y="1600200"/>
+            <a:ext cx="2743200" cy="777240"/>
           </a:xfrm>
           <a:prstGeom prst="rect">
             <a:avLst/>
           </a:prstGeom>
           <a:solidFill>
-            <a:srgbClr val="C8963C"/>
+            <a:srgbClr val="3A2A08"/>
           </a:solidFill>
           <a:ln>
             <a:noFill/>
@@ -17822,14 +17857,14 @@
       </p:sp>
       <p:sp>
         <p:nvSpPr>
-          <p:cNvPr id="12" name="TextBox 11"/>
-          <p:cNvSpPr txBox="1"/>
-          <p:nvPr/>
-        </p:nvSpPr>
-        <p:spPr>
-          <a:xfrm>
-            <a:off x="3931920" y="1673352"/>
-            <a:ext cx="457200" cy="256032"/>
+          <p:cNvPr id="13" name="TextBox 12"/>
+          <p:cNvSpPr txBox="1"/>
+          <p:nvPr/>
+        </p:nvSpPr>
+        <p:spPr>
+          <a:xfrm>
+            <a:off x="6400800" y="1645920"/>
+            <a:ext cx="2560320" cy="274320"/>
           </a:xfrm>
           <a:prstGeom prst="rect">
             <a:avLst/>
@@ -17844,67 +17879,66 @@
           <a:p>
             <a:pPr algn="ctr"/>
             <a:r>
-              <a:rPr sz="900" b="1" i="0">
-                <a:solidFill>
-                  <a:srgbClr val="1A120B"/>
-                </a:solidFill>
-              </a:rPr>
-              <a:t>対策</a:t>
-            </a:r>
-          </a:p>
-        </p:txBody>
-      </p:sp>
-      <p:sp>
-        <p:nvSpPr>
-          <p:cNvPr id="13" name="TextBox 12"/>
-          <p:cNvSpPr txBox="1"/>
-          <p:nvPr/>
-        </p:nvSpPr>
-        <p:spPr>
-          <a:xfrm>
-            <a:off x="4480560" y="1645920"/>
-            <a:ext cx="7040880" cy="768096"/>
-          </a:xfrm>
-          <a:prstGeom prst="rect">
-            <a:avLst/>
-          </a:prstGeom>
-          <a:noFill/>
-        </p:spPr>
-        <p:txBody>
-          <a:bodyPr wrap="square">
-            <a:spAutoFit/>
-          </a:bodyPr>
-          <a:lstStyle/>
-          <a:p>
-            <a:pPr algn="l"/>
-            <a:r>
-              <a:rPr sz="1100" b="0" i="0">
-                <a:solidFill>
-                  <a:srgbClr val="F0E6D3"/>
-                </a:solidFill>
-              </a:rPr>
-              <a:t>開業3ヶ月前からインフルエンサー戦略を実行。
-手元残金630万円で最大6ヶ月の赤字に耐えられる財務設計。</a:t>
-            </a:r>
-          </a:p>
-        </p:txBody>
-      </p:sp>
-      <p:sp>
-        <p:nvSpPr>
-          <p:cNvPr id="14" name="Rectangle 13"/>
+              <a:rPr sz="1000" b="0" i="0">
+                <a:solidFill>
+                  <a:srgbClr val="8A7A6A"/>
+                </a:solidFill>
+              </a:rPr>
+              <a:t>7年目 営業利益</a:t>
+            </a:r>
+          </a:p>
+        </p:txBody>
+      </p:sp>
+      <p:sp>
+        <p:nvSpPr>
+          <p:cNvPr id="14" name="TextBox 13"/>
+          <p:cNvSpPr txBox="1"/>
+          <p:nvPr/>
+        </p:nvSpPr>
+        <p:spPr>
+          <a:xfrm>
+            <a:off x="6400800" y="1920240"/>
+            <a:ext cx="2560320" cy="402336"/>
+          </a:xfrm>
+          <a:prstGeom prst="rect">
+            <a:avLst/>
+          </a:prstGeom>
+          <a:noFill/>
+        </p:spPr>
+        <p:txBody>
+          <a:bodyPr wrap="square">
+            <a:spAutoFit/>
+          </a:bodyPr>
+          <a:lstStyle/>
+          <a:p>
+            <a:pPr algn="ctr"/>
+            <a:r>
+              <a:rPr sz="1800" b="1" i="0">
+                <a:solidFill>
+                  <a:srgbClr val="C8963C"/>
+                </a:solidFill>
+              </a:rPr>
+              <a:t>26億円</a:t>
+            </a:r>
+          </a:p>
+        </p:txBody>
+      </p:sp>
+      <p:sp>
+        <p:nvSpPr>
+          <p:cNvPr id="15" name="Rectangle 14"/>
           <p:cNvSpPr/>
           <p:nvPr/>
         </p:nvSpPr>
         <p:spPr>
           <a:xfrm>
-            <a:off x="457200" y="2532888"/>
-            <a:ext cx="11247120" cy="859536"/>
+            <a:off x="9235440" y="1600200"/>
+            <a:ext cx="2743200" cy="777240"/>
           </a:xfrm>
           <a:prstGeom prst="rect">
             <a:avLst/>
           </a:prstGeom>
           <a:solidFill>
-            <a:srgbClr val="2A1E12"/>
+            <a:srgbClr val="3A2A08"/>
           </a:solidFill>
           <a:ln>
             <a:noFill/>
@@ -17934,57 +17968,48 @@
       </p:sp>
       <p:sp>
         <p:nvSpPr>
-          <p:cNvPr id="15" name="Rectangle 14"/>
-          <p:cNvSpPr/>
-          <p:nvPr/>
-        </p:nvSpPr>
-        <p:spPr>
-          <a:xfrm>
-            <a:off x="457200" y="2532888"/>
-            <a:ext cx="457200" cy="859536"/>
-          </a:xfrm>
-          <a:prstGeom prst="rect">
-            <a:avLst/>
-          </a:prstGeom>
-          <a:solidFill>
-            <a:srgbClr val="C8963C"/>
-          </a:solidFill>
-          <a:ln>
-            <a:noFill/>
-          </a:ln>
-        </p:spPr>
-        <p:style>
-          <a:lnRef idx="1">
-            <a:schemeClr val="accent1"/>
-          </a:lnRef>
-          <a:fillRef idx="3">
-            <a:schemeClr val="accent1"/>
-          </a:fillRef>
-          <a:effectRef idx="2">
-            <a:schemeClr val="accent1"/>
-          </a:effectRef>
-          <a:fontRef idx="minor">
-            <a:schemeClr val="lt1"/>
-          </a:fontRef>
-        </p:style>
-        <p:txBody>
-          <a:bodyPr rtlCol="0" anchor="ctr"/>
+          <p:cNvPr id="16" name="TextBox 15"/>
+          <p:cNvSpPr txBox="1"/>
+          <p:nvPr/>
+        </p:nvSpPr>
+        <p:spPr>
+          <a:xfrm>
+            <a:off x="9326880" y="1645920"/>
+            <a:ext cx="2560320" cy="274320"/>
+          </a:xfrm>
+          <a:prstGeom prst="rect">
+            <a:avLst/>
+          </a:prstGeom>
+          <a:noFill/>
+        </p:spPr>
+        <p:txBody>
+          <a:bodyPr wrap="square">
+            <a:spAutoFit/>
+          </a:bodyPr>
           <a:lstStyle/>
           <a:p>
             <a:pPr algn="ctr"/>
-          </a:p>
-        </p:txBody>
-      </p:sp>
-      <p:sp>
-        <p:nvSpPr>
-          <p:cNvPr id="16" name="TextBox 15"/>
-          <p:cNvSpPr txBox="1"/>
-          <p:nvPr/>
-        </p:nvSpPr>
-        <p:spPr>
-          <a:xfrm>
-            <a:off x="457200" y="2788920"/>
-            <a:ext cx="457200" cy="329184"/>
+            <a:r>
+              <a:rPr sz="1000" b="0" i="0">
+                <a:solidFill>
+                  <a:srgbClr val="8A7A6A"/>
+                </a:solidFill>
+              </a:rPr>
+              <a:t>7年目 企業価値</a:t>
+            </a:r>
+          </a:p>
+        </p:txBody>
+      </p:sp>
+      <p:sp>
+        <p:nvSpPr>
+          <p:cNvPr id="17" name="TextBox 16"/>
+          <p:cNvSpPr txBox="1"/>
+          <p:nvPr/>
+        </p:nvSpPr>
+        <p:spPr>
+          <a:xfrm>
+            <a:off x="9326880" y="1920240"/>
+            <a:ext cx="2560320" cy="402336"/>
           </a:xfrm>
           <a:prstGeom prst="rect">
             <a:avLst/>
@@ -17999,1099 +18024,125 @@
           <a:p>
             <a:pPr algn="ctr"/>
             <a:r>
-              <a:rPr sz="1100" b="1" i="0">
-                <a:solidFill>
-                  <a:srgbClr val="1A120B"/>
-                </a:solidFill>
-              </a:rPr>
-              <a:t>中</a:t>
-            </a:r>
-          </a:p>
-        </p:txBody>
-      </p:sp>
-      <p:sp>
-        <p:nvSpPr>
-          <p:cNvPr id="17" name="TextBox 16"/>
-          <p:cNvSpPr txBox="1"/>
-          <p:nvPr/>
-        </p:nvSpPr>
-        <p:spPr>
-          <a:xfrm>
-            <a:off x="1005840" y="2578608"/>
-            <a:ext cx="2743200" cy="347472"/>
-          </a:xfrm>
-          <a:prstGeom prst="rect">
-            <a:avLst/>
-          </a:prstGeom>
-          <a:noFill/>
-        </p:spPr>
-        <p:txBody>
-          <a:bodyPr wrap="square">
-            <a:spAutoFit/>
-          </a:bodyPr>
-          <a:lstStyle/>
-          <a:p>
-            <a:pPr algn="l"/>
-            <a:r>
-              <a:rPr sz="1300" b="1" i="0">
-                <a:solidFill>
-                  <a:srgbClr val="FFFFFF"/>
-                </a:solidFill>
-              </a:rPr>
-              <a:t>② 人材採用・定着の問題</a:t>
-            </a:r>
-          </a:p>
-        </p:txBody>
-      </p:sp>
-      <p:sp>
-        <p:nvSpPr>
-          <p:cNvPr id="18" name="TextBox 17"/>
-          <p:cNvSpPr txBox="1"/>
-          <p:nvPr/>
-        </p:nvSpPr>
-        <p:spPr>
-          <a:xfrm>
-            <a:off x="1005840" y="2971800"/>
-            <a:ext cx="2743200" cy="347472"/>
-          </a:xfrm>
-          <a:prstGeom prst="rect">
-            <a:avLst/>
-          </a:prstGeom>
-          <a:noFill/>
-        </p:spPr>
-        <p:txBody>
-          <a:bodyPr wrap="square">
-            <a:spAutoFit/>
-          </a:bodyPr>
-          <a:lstStyle/>
-          <a:p>
-            <a:pPr algn="l"/>
-            <a:r>
-              <a:rPr sz="1100" b="0" i="1">
+              <a:rPr sz="1800" b="1" i="0">
+                <a:solidFill>
+                  <a:srgbClr val="C8963C"/>
+                </a:solidFill>
+              </a:rPr>
+              <a:t>約648億円</a:t>
+            </a:r>
+          </a:p>
+        </p:txBody>
+      </p:sp>
+      <p:pic>
+        <p:nvPicPr>
+          <p:cNvPr id="18" name="Picture 17" descr="image.png"/>
+          <p:cNvPicPr>
+            <a:picLocks noChangeAspect="1"/>
+          </p:cNvPicPr>
+          <p:nvPr/>
+        </p:nvPicPr>
+        <p:blipFill>
+          <a:blip r:embed="rId2"/>
+          <a:stretch>
+            <a:fillRect/>
+          </a:stretch>
+        </p:blipFill>
+        <p:spPr>
+          <a:xfrm>
+            <a:off x="365760" y="2514600"/>
+            <a:ext cx="3749039" cy="2286000"/>
+          </a:xfrm>
+          <a:prstGeom prst="rect">
+            <a:avLst/>
+          </a:prstGeom>
+        </p:spPr>
+      </p:pic>
+      <p:pic>
+        <p:nvPicPr>
+          <p:cNvPr id="19" name="Picture 18" descr="image.png"/>
+          <p:cNvPicPr>
+            <a:picLocks noChangeAspect="1"/>
+          </p:cNvPicPr>
+          <p:nvPr/>
+        </p:nvPicPr>
+        <p:blipFill>
+          <a:blip r:embed="rId3"/>
+          <a:stretch>
+            <a:fillRect/>
+          </a:stretch>
+        </p:blipFill>
+        <p:spPr>
+          <a:xfrm>
+            <a:off x="4206240" y="2514600"/>
+            <a:ext cx="3749039" cy="2286000"/>
+          </a:xfrm>
+          <a:prstGeom prst="rect">
+            <a:avLst/>
+          </a:prstGeom>
+        </p:spPr>
+      </p:pic>
+      <p:pic>
+        <p:nvPicPr>
+          <p:cNvPr id="20" name="Picture 19" descr="image.png"/>
+          <p:cNvPicPr>
+            <a:picLocks noChangeAspect="1"/>
+          </p:cNvPicPr>
+          <p:nvPr/>
+        </p:nvPicPr>
+        <p:blipFill>
+          <a:blip r:embed="rId4"/>
+          <a:stretch>
+            <a:fillRect/>
+          </a:stretch>
+        </p:blipFill>
+        <p:spPr>
+          <a:xfrm>
+            <a:off x="8046720" y="2514600"/>
+            <a:ext cx="3931920" cy="2286000"/>
+          </a:xfrm>
+          <a:prstGeom prst="rect">
+            <a:avLst/>
+          </a:prstGeom>
+        </p:spPr>
+      </p:pic>
+      <p:sp>
+        <p:nvSpPr>
+          <p:cNvPr id="21" name="TextBox 20"/>
+          <p:cNvSpPr txBox="1"/>
+          <p:nvPr/>
+        </p:nvSpPr>
+        <p:spPr>
+          <a:xfrm>
+            <a:off x="457200" y="6492240"/>
+            <a:ext cx="11247120" cy="274320"/>
+          </a:xfrm>
+          <a:prstGeom prst="rect">
+            <a:avLst/>
+          </a:prstGeom>
+          <a:noFill/>
+        </p:spPr>
+        <p:txBody>
+          <a:bodyPr wrap="square">
+            <a:spAutoFit/>
+          </a:bodyPr>
+          <a:lstStyle/>
+          <a:p>
+            <a:pPr algn="ctr"/>
+            <a:r>
+              <a:rPr sz="1000" b="0" i="1">
                 <a:solidFill>
                   <a:srgbClr val="8A7A6A"/>
                 </a:solidFill>
               </a:rPr>
-              <a:t>飲食業界の人手不足・離職率の高さ</a:t>
-            </a:r>
-          </a:p>
-        </p:txBody>
-      </p:sp>
-      <p:sp>
-        <p:nvSpPr>
-          <p:cNvPr id="19" name="Rectangle 18"/>
-          <p:cNvSpPr/>
-          <p:nvPr/>
-        </p:nvSpPr>
-        <p:spPr>
-          <a:xfrm>
-            <a:off x="3931920" y="2606040"/>
-            <a:ext cx="457200" cy="256032"/>
-          </a:xfrm>
-          <a:prstGeom prst="rect">
-            <a:avLst/>
-          </a:prstGeom>
-          <a:solidFill>
-            <a:srgbClr val="C8963C"/>
-          </a:solidFill>
-          <a:ln>
-            <a:noFill/>
-          </a:ln>
-        </p:spPr>
-        <p:style>
-          <a:lnRef idx="1">
-            <a:schemeClr val="accent1"/>
-          </a:lnRef>
-          <a:fillRef idx="3">
-            <a:schemeClr val="accent1"/>
-          </a:fillRef>
-          <a:effectRef idx="2">
-            <a:schemeClr val="accent1"/>
-          </a:effectRef>
-          <a:fontRef idx="minor">
-            <a:schemeClr val="lt1"/>
-          </a:fontRef>
-        </p:style>
-        <p:txBody>
-          <a:bodyPr rtlCol="0" anchor="ctr"/>
-          <a:lstStyle/>
-          <a:p>
-            <a:pPr algn="ctr"/>
-          </a:p>
-        </p:txBody>
-      </p:sp>
-      <p:sp>
-        <p:nvSpPr>
-          <p:cNvPr id="20" name="TextBox 19"/>
-          <p:cNvSpPr txBox="1"/>
-          <p:nvPr/>
-        </p:nvSpPr>
-        <p:spPr>
-          <a:xfrm>
-            <a:off x="3931920" y="2606040"/>
-            <a:ext cx="457200" cy="256032"/>
-          </a:xfrm>
-          <a:prstGeom prst="rect">
-            <a:avLst/>
-          </a:prstGeom>
-          <a:noFill/>
-        </p:spPr>
-        <p:txBody>
-          <a:bodyPr wrap="square">
-            <a:spAutoFit/>
-          </a:bodyPr>
-          <a:lstStyle/>
-          <a:p>
-            <a:pPr algn="ctr"/>
-            <a:r>
-              <a:rPr sz="900" b="1" i="0">
-                <a:solidFill>
-                  <a:srgbClr val="1A120B"/>
-                </a:solidFill>
-              </a:rPr>
-              <a:t>対策</a:t>
-            </a:r>
-          </a:p>
-        </p:txBody>
-      </p:sp>
-      <p:sp>
-        <p:nvSpPr>
-          <p:cNvPr id="21" name="TextBox 20"/>
-          <p:cNvSpPr txBox="1"/>
-          <p:nvPr/>
-        </p:nvSpPr>
-        <p:spPr>
-          <a:xfrm>
-            <a:off x="4480560" y="2578608"/>
-            <a:ext cx="7040880" cy="768096"/>
-          </a:xfrm>
-          <a:prstGeom prst="rect">
-            <a:avLst/>
-          </a:prstGeom>
-          <a:noFill/>
-        </p:spPr>
-        <p:txBody>
-          <a:bodyPr wrap="square">
-            <a:spAutoFit/>
-          </a:bodyPr>
-          <a:lstStyle/>
-          <a:p>
-            <a:pPr algn="l"/>
-            <a:r>
-              <a:rPr sz="1100" b="0" i="0">
-                <a:solidFill>
-                  <a:srgbClr val="F0E6D3"/>
-                </a:solidFill>
-              </a:rPr>
-              <a:t>時給を相場より50〜100円高く設定し採用競争力を確保。
-仕組み化により属人依存を排除。常時採用を継続。</a:t>
-            </a:r>
-          </a:p>
-        </p:txBody>
-      </p:sp>
-      <p:sp>
-        <p:nvSpPr>
-          <p:cNvPr id="22" name="Rectangle 21"/>
-          <p:cNvSpPr/>
-          <p:nvPr/>
-        </p:nvSpPr>
-        <p:spPr>
-          <a:xfrm>
-            <a:off x="457200" y="3465576"/>
-            <a:ext cx="11247120" cy="859536"/>
-          </a:xfrm>
-          <a:prstGeom prst="rect">
-            <a:avLst/>
-          </a:prstGeom>
-          <a:solidFill>
-            <a:srgbClr val="2A1E12"/>
-          </a:solidFill>
-          <a:ln>
-            <a:noFill/>
-          </a:ln>
-        </p:spPr>
-        <p:style>
-          <a:lnRef idx="1">
-            <a:schemeClr val="accent1"/>
-          </a:lnRef>
-          <a:fillRef idx="3">
-            <a:schemeClr val="accent1"/>
-          </a:fillRef>
-          <a:effectRef idx="2">
-            <a:schemeClr val="accent1"/>
-          </a:effectRef>
-          <a:fontRef idx="minor">
-            <a:schemeClr val="lt1"/>
-          </a:fontRef>
-        </p:style>
-        <p:txBody>
-          <a:bodyPr rtlCol="0" anchor="ctr"/>
-          <a:lstStyle/>
-          <a:p>
-            <a:pPr algn="ctr"/>
-          </a:p>
-        </p:txBody>
-      </p:sp>
-      <p:sp>
-        <p:nvSpPr>
-          <p:cNvPr id="23" name="Rectangle 22"/>
-          <p:cNvSpPr/>
-          <p:nvPr/>
-        </p:nvSpPr>
-        <p:spPr>
-          <a:xfrm>
-            <a:off x="457200" y="3465576"/>
-            <a:ext cx="457200" cy="859536"/>
-          </a:xfrm>
-          <a:prstGeom prst="rect">
-            <a:avLst/>
-          </a:prstGeom>
-          <a:solidFill>
-            <a:srgbClr val="C8963C"/>
-          </a:solidFill>
-          <a:ln>
-            <a:noFill/>
-          </a:ln>
-        </p:spPr>
-        <p:style>
-          <a:lnRef idx="1">
-            <a:schemeClr val="accent1"/>
-          </a:lnRef>
-          <a:fillRef idx="3">
-            <a:schemeClr val="accent1"/>
-          </a:fillRef>
-          <a:effectRef idx="2">
-            <a:schemeClr val="accent1"/>
-          </a:effectRef>
-          <a:fontRef idx="minor">
-            <a:schemeClr val="lt1"/>
-          </a:fontRef>
-        </p:style>
-        <p:txBody>
-          <a:bodyPr rtlCol="0" anchor="ctr"/>
-          <a:lstStyle/>
-          <a:p>
-            <a:pPr algn="ctr"/>
-          </a:p>
-        </p:txBody>
-      </p:sp>
-      <p:sp>
-        <p:nvSpPr>
-          <p:cNvPr id="24" name="TextBox 23"/>
-          <p:cNvSpPr txBox="1"/>
-          <p:nvPr/>
-        </p:nvSpPr>
-        <p:spPr>
-          <a:xfrm>
-            <a:off x="457200" y="3721608"/>
-            <a:ext cx="457200" cy="329184"/>
-          </a:xfrm>
-          <a:prstGeom prst="rect">
-            <a:avLst/>
-          </a:prstGeom>
-          <a:noFill/>
-        </p:spPr>
-        <p:txBody>
-          <a:bodyPr wrap="square">
-            <a:spAutoFit/>
-          </a:bodyPr>
-          <a:lstStyle/>
-          <a:p>
-            <a:pPr algn="ctr"/>
-            <a:r>
-              <a:rPr sz="1100" b="1" i="0">
-                <a:solidFill>
-                  <a:srgbClr val="1A120B"/>
-                </a:solidFill>
-              </a:rPr>
-              <a:t>中</a:t>
-            </a:r>
-          </a:p>
-        </p:txBody>
-      </p:sp>
-      <p:sp>
-        <p:nvSpPr>
-          <p:cNvPr id="25" name="TextBox 24"/>
-          <p:cNvSpPr txBox="1"/>
-          <p:nvPr/>
-        </p:nvSpPr>
-        <p:spPr>
-          <a:xfrm>
-            <a:off x="1005840" y="3511296"/>
-            <a:ext cx="2743200" cy="347472"/>
-          </a:xfrm>
-          <a:prstGeom prst="rect">
-            <a:avLst/>
-          </a:prstGeom>
-          <a:noFill/>
-        </p:spPr>
-        <p:txBody>
-          <a:bodyPr wrap="square">
-            <a:spAutoFit/>
-          </a:bodyPr>
-          <a:lstStyle/>
-          <a:p>
-            <a:pPr algn="l"/>
-            <a:r>
-              <a:rPr sz="1300" b="1" i="0">
-                <a:solidFill>
-                  <a:srgbClr val="FFFFFF"/>
-                </a:solidFill>
-              </a:rPr>
-              <a:t>③ 原材料費の高騰</a:t>
-            </a:r>
-          </a:p>
-        </p:txBody>
-      </p:sp>
-      <p:sp>
-        <p:nvSpPr>
-          <p:cNvPr id="26" name="TextBox 25"/>
-          <p:cNvSpPr txBox="1"/>
-          <p:nvPr/>
-        </p:nvSpPr>
-        <p:spPr>
-          <a:xfrm>
-            <a:off x="1005840" y="3904488"/>
-            <a:ext cx="2743200" cy="347472"/>
-          </a:xfrm>
-          <a:prstGeom prst="rect">
-            <a:avLst/>
-          </a:prstGeom>
-          <a:noFill/>
-        </p:spPr>
-        <p:txBody>
-          <a:bodyPr wrap="square">
-            <a:spAutoFit/>
-          </a:bodyPr>
-          <a:lstStyle/>
-          <a:p>
-            <a:pPr algn="l"/>
-            <a:r>
-              <a:rPr sz="1100" b="0" i="1">
-                <a:solidFill>
-                  <a:srgbClr val="8A7A6A"/>
-                </a:solidFill>
-              </a:rPr>
-              <a:t>牛サガリの価格変動・円安影響</a:t>
-            </a:r>
-          </a:p>
-        </p:txBody>
-      </p:sp>
-      <p:sp>
-        <p:nvSpPr>
-          <p:cNvPr id="27" name="Rectangle 26"/>
-          <p:cNvSpPr/>
-          <p:nvPr/>
-        </p:nvSpPr>
-        <p:spPr>
-          <a:xfrm>
-            <a:off x="3931920" y="3538728"/>
-            <a:ext cx="457200" cy="256032"/>
-          </a:xfrm>
-          <a:prstGeom prst="rect">
-            <a:avLst/>
-          </a:prstGeom>
-          <a:solidFill>
-            <a:srgbClr val="C8963C"/>
-          </a:solidFill>
-          <a:ln>
-            <a:noFill/>
-          </a:ln>
-        </p:spPr>
-        <p:style>
-          <a:lnRef idx="1">
-            <a:schemeClr val="accent1"/>
-          </a:lnRef>
-          <a:fillRef idx="3">
-            <a:schemeClr val="accent1"/>
-          </a:fillRef>
-          <a:effectRef idx="2">
-            <a:schemeClr val="accent1"/>
-          </a:effectRef>
-          <a:fontRef idx="minor">
-            <a:schemeClr val="lt1"/>
-          </a:fontRef>
-        </p:style>
-        <p:txBody>
-          <a:bodyPr rtlCol="0" anchor="ctr"/>
-          <a:lstStyle/>
-          <a:p>
-            <a:pPr algn="ctr"/>
-          </a:p>
-        </p:txBody>
-      </p:sp>
-      <p:sp>
-        <p:nvSpPr>
-          <p:cNvPr id="28" name="TextBox 27"/>
-          <p:cNvSpPr txBox="1"/>
-          <p:nvPr/>
-        </p:nvSpPr>
-        <p:spPr>
-          <a:xfrm>
-            <a:off x="3931920" y="3538728"/>
-            <a:ext cx="457200" cy="256032"/>
-          </a:xfrm>
-          <a:prstGeom prst="rect">
-            <a:avLst/>
-          </a:prstGeom>
-          <a:noFill/>
-        </p:spPr>
-        <p:txBody>
-          <a:bodyPr wrap="square">
-            <a:spAutoFit/>
-          </a:bodyPr>
-          <a:lstStyle/>
-          <a:p>
-            <a:pPr algn="ctr"/>
-            <a:r>
-              <a:rPr sz="900" b="1" i="0">
-                <a:solidFill>
-                  <a:srgbClr val="1A120B"/>
-                </a:solidFill>
-              </a:rPr>
-              <a:t>対策</a:t>
-            </a:r>
-          </a:p>
-        </p:txBody>
-      </p:sp>
-      <p:sp>
-        <p:nvSpPr>
-          <p:cNvPr id="29" name="TextBox 28"/>
-          <p:cNvSpPr txBox="1"/>
-          <p:nvPr/>
-        </p:nvSpPr>
-        <p:spPr>
-          <a:xfrm>
-            <a:off x="4480560" y="3511296"/>
-            <a:ext cx="7040880" cy="768096"/>
-          </a:xfrm>
-          <a:prstGeom prst="rect">
-            <a:avLst/>
-          </a:prstGeom>
-          <a:noFill/>
-        </p:spPr>
-        <p:txBody>
-          <a:bodyPr wrap="square">
-            <a:spAutoFit/>
-          </a:bodyPr>
-          <a:lstStyle/>
-          <a:p>
-            <a:pPr algn="l"/>
-            <a:r>
-              <a:rPr sz="1100" b="0" i="0">
-                <a:solidFill>
-                  <a:srgbClr val="F0E6D3"/>
-                </a:solidFill>
-              </a:rPr>
-              <a:t>複数仕入れ先を確保し価格交渉力を維持。
-鶏・豚メニューの比率調整で原価率をコントロール。</a:t>
-            </a:r>
-          </a:p>
-        </p:txBody>
-      </p:sp>
-      <p:sp>
-        <p:nvSpPr>
-          <p:cNvPr id="30" name="Rectangle 29"/>
-          <p:cNvSpPr/>
-          <p:nvPr/>
-        </p:nvSpPr>
-        <p:spPr>
-          <a:xfrm>
-            <a:off x="457200" y="4398264"/>
-            <a:ext cx="11247120" cy="859536"/>
-          </a:xfrm>
-          <a:prstGeom prst="rect">
-            <a:avLst/>
-          </a:prstGeom>
-          <a:solidFill>
-            <a:srgbClr val="2A1E12"/>
-          </a:solidFill>
-          <a:ln>
-            <a:noFill/>
-          </a:ln>
-        </p:spPr>
-        <p:style>
-          <a:lnRef idx="1">
-            <a:schemeClr val="accent1"/>
-          </a:lnRef>
-          <a:fillRef idx="3">
-            <a:schemeClr val="accent1"/>
-          </a:fillRef>
-          <a:effectRef idx="2">
-            <a:schemeClr val="accent1"/>
-          </a:effectRef>
-          <a:fontRef idx="minor">
-            <a:schemeClr val="lt1"/>
-          </a:fontRef>
-        </p:style>
-        <p:txBody>
-          <a:bodyPr rtlCol="0" anchor="ctr"/>
-          <a:lstStyle/>
-          <a:p>
-            <a:pPr algn="ctr"/>
-          </a:p>
-        </p:txBody>
-      </p:sp>
-      <p:sp>
-        <p:nvSpPr>
-          <p:cNvPr id="31" name="Rectangle 30"/>
-          <p:cNvSpPr/>
-          <p:nvPr/>
-        </p:nvSpPr>
-        <p:spPr>
-          <a:xfrm>
-            <a:off x="457200" y="4398264"/>
-            <a:ext cx="457200" cy="859536"/>
-          </a:xfrm>
-          <a:prstGeom prst="rect">
-            <a:avLst/>
-          </a:prstGeom>
-          <a:solidFill>
-            <a:srgbClr val="277A5A"/>
-          </a:solidFill>
-          <a:ln>
-            <a:noFill/>
-          </a:ln>
-        </p:spPr>
-        <p:style>
-          <a:lnRef idx="1">
-            <a:schemeClr val="accent1"/>
-          </a:lnRef>
-          <a:fillRef idx="3">
-            <a:schemeClr val="accent1"/>
-          </a:fillRef>
-          <a:effectRef idx="2">
-            <a:schemeClr val="accent1"/>
-          </a:effectRef>
-          <a:fontRef idx="minor">
-            <a:schemeClr val="lt1"/>
-          </a:fontRef>
-        </p:style>
-        <p:txBody>
-          <a:bodyPr rtlCol="0" anchor="ctr"/>
-          <a:lstStyle/>
-          <a:p>
-            <a:pPr algn="ctr"/>
-          </a:p>
-        </p:txBody>
-      </p:sp>
-      <p:sp>
-        <p:nvSpPr>
-          <p:cNvPr id="32" name="TextBox 31"/>
-          <p:cNvSpPr txBox="1"/>
-          <p:nvPr/>
-        </p:nvSpPr>
-        <p:spPr>
-          <a:xfrm>
-            <a:off x="457200" y="4654296"/>
-            <a:ext cx="457200" cy="329184"/>
-          </a:xfrm>
-          <a:prstGeom prst="rect">
-            <a:avLst/>
-          </a:prstGeom>
-          <a:noFill/>
-        </p:spPr>
-        <p:txBody>
-          <a:bodyPr wrap="square">
-            <a:spAutoFit/>
-          </a:bodyPr>
-          <a:lstStyle/>
-          <a:p>
-            <a:pPr algn="ctr"/>
-            <a:r>
-              <a:rPr sz="1100" b="1" i="0">
-                <a:solidFill>
-                  <a:srgbClr val="1A120B"/>
-                </a:solidFill>
-              </a:rPr>
-              <a:t>低</a:t>
-            </a:r>
-          </a:p>
-        </p:txBody>
-      </p:sp>
-      <p:sp>
-        <p:nvSpPr>
-          <p:cNvPr id="33" name="TextBox 32"/>
-          <p:cNvSpPr txBox="1"/>
-          <p:nvPr/>
-        </p:nvSpPr>
-        <p:spPr>
-          <a:xfrm>
-            <a:off x="1005840" y="4443984"/>
-            <a:ext cx="2743200" cy="347472"/>
-          </a:xfrm>
-          <a:prstGeom prst="rect">
-            <a:avLst/>
-          </a:prstGeom>
-          <a:noFill/>
-        </p:spPr>
-        <p:txBody>
-          <a:bodyPr wrap="square">
-            <a:spAutoFit/>
-          </a:bodyPr>
-          <a:lstStyle/>
-          <a:p>
-            <a:pPr algn="l"/>
-            <a:r>
-              <a:rPr sz="1300" b="1" i="0">
-                <a:solidFill>
-                  <a:srgbClr val="FFFFFF"/>
-                </a:solidFill>
-              </a:rPr>
-              <a:t>④ 競合の模倣・追随</a:t>
-            </a:r>
-          </a:p>
-        </p:txBody>
-      </p:sp>
-      <p:sp>
-        <p:nvSpPr>
-          <p:cNvPr id="34" name="TextBox 33"/>
-          <p:cNvSpPr txBox="1"/>
-          <p:nvPr/>
-        </p:nvSpPr>
-        <p:spPr>
-          <a:xfrm>
-            <a:off x="1005840" y="4837176"/>
-            <a:ext cx="2743200" cy="347472"/>
-          </a:xfrm>
-          <a:prstGeom prst="rect">
-            <a:avLst/>
-          </a:prstGeom>
-          <a:noFill/>
-        </p:spPr>
-        <p:txBody>
-          <a:bodyPr wrap="square">
-            <a:spAutoFit/>
-          </a:bodyPr>
-          <a:lstStyle/>
-          <a:p>
-            <a:pPr algn="l"/>
-            <a:r>
-              <a:rPr sz="1100" b="0" i="1">
-                <a:solidFill>
-                  <a:srgbClr val="8A7A6A"/>
-                </a:solidFill>
-              </a:rPr>
-              <a:t>糀漬け肉定食業態の競合参入</a:t>
-            </a:r>
-          </a:p>
-        </p:txBody>
-      </p:sp>
-      <p:sp>
-        <p:nvSpPr>
-          <p:cNvPr id="35" name="Rectangle 34"/>
-          <p:cNvSpPr/>
-          <p:nvPr/>
-        </p:nvSpPr>
-        <p:spPr>
-          <a:xfrm>
-            <a:off x="3931920" y="4471416"/>
-            <a:ext cx="457200" cy="256032"/>
-          </a:xfrm>
-          <a:prstGeom prst="rect">
-            <a:avLst/>
-          </a:prstGeom>
-          <a:solidFill>
-            <a:srgbClr val="C8963C"/>
-          </a:solidFill>
-          <a:ln>
-            <a:noFill/>
-          </a:ln>
-        </p:spPr>
-        <p:style>
-          <a:lnRef idx="1">
-            <a:schemeClr val="accent1"/>
-          </a:lnRef>
-          <a:fillRef idx="3">
-            <a:schemeClr val="accent1"/>
-          </a:fillRef>
-          <a:effectRef idx="2">
-            <a:schemeClr val="accent1"/>
-          </a:effectRef>
-          <a:fontRef idx="minor">
-            <a:schemeClr val="lt1"/>
-          </a:fontRef>
-        </p:style>
-        <p:txBody>
-          <a:bodyPr rtlCol="0" anchor="ctr"/>
-          <a:lstStyle/>
-          <a:p>
-            <a:pPr algn="ctr"/>
-          </a:p>
-        </p:txBody>
-      </p:sp>
-      <p:sp>
-        <p:nvSpPr>
-          <p:cNvPr id="36" name="TextBox 35"/>
-          <p:cNvSpPr txBox="1"/>
-          <p:nvPr/>
-        </p:nvSpPr>
-        <p:spPr>
-          <a:xfrm>
-            <a:off x="3931920" y="4471416"/>
-            <a:ext cx="457200" cy="256032"/>
-          </a:xfrm>
-          <a:prstGeom prst="rect">
-            <a:avLst/>
-          </a:prstGeom>
-          <a:noFill/>
-        </p:spPr>
-        <p:txBody>
-          <a:bodyPr wrap="square">
-            <a:spAutoFit/>
-          </a:bodyPr>
-          <a:lstStyle/>
-          <a:p>
-            <a:pPr algn="ctr"/>
-            <a:r>
-              <a:rPr sz="900" b="1" i="0">
-                <a:solidFill>
-                  <a:srgbClr val="1A120B"/>
-                </a:solidFill>
-              </a:rPr>
-              <a:t>対策</a:t>
-            </a:r>
-          </a:p>
-        </p:txBody>
-      </p:sp>
-      <p:sp>
-        <p:nvSpPr>
-          <p:cNvPr id="37" name="TextBox 36"/>
-          <p:cNvSpPr txBox="1"/>
-          <p:nvPr/>
-        </p:nvSpPr>
-        <p:spPr>
-          <a:xfrm>
-            <a:off x="4480560" y="4443984"/>
-            <a:ext cx="7040880" cy="768096"/>
-          </a:xfrm>
-          <a:prstGeom prst="rect">
-            <a:avLst/>
-          </a:prstGeom>
-          <a:noFill/>
-        </p:spPr>
-        <p:txBody>
-          <a:bodyPr wrap="square">
-            <a:spAutoFit/>
-          </a:bodyPr>
-          <a:lstStyle/>
-          <a:p>
-            <a:pPr algn="l"/>
-            <a:r>
-              <a:rPr sz="1100" b="0" i="0">
-                <a:solidFill>
-                  <a:srgbClr val="F0E6D3"/>
-                </a:solidFill>
-              </a:rPr>
-              <a:t>ブランド「然」の商標登録で保護（第43類・飲食）。
-先行者優位と顧客ロイヤリティで差別化を維持。</a:t>
-            </a:r>
-          </a:p>
-        </p:txBody>
-      </p:sp>
-      <p:sp>
-        <p:nvSpPr>
-          <p:cNvPr id="38" name="Rectangle 37"/>
-          <p:cNvSpPr/>
-          <p:nvPr/>
-        </p:nvSpPr>
-        <p:spPr>
-          <a:xfrm>
-            <a:off x="457200" y="5330952"/>
-            <a:ext cx="11247120" cy="859536"/>
-          </a:xfrm>
-          <a:prstGeom prst="rect">
-            <a:avLst/>
-          </a:prstGeom>
-          <a:solidFill>
-            <a:srgbClr val="2A1E12"/>
-          </a:solidFill>
-          <a:ln>
-            <a:noFill/>
-          </a:ln>
-        </p:spPr>
-        <p:style>
-          <a:lnRef idx="1">
-            <a:schemeClr val="accent1"/>
-          </a:lnRef>
-          <a:fillRef idx="3">
-            <a:schemeClr val="accent1"/>
-          </a:fillRef>
-          <a:effectRef idx="2">
-            <a:schemeClr val="accent1"/>
-          </a:effectRef>
-          <a:fontRef idx="minor">
-            <a:schemeClr val="lt1"/>
-          </a:fontRef>
-        </p:style>
-        <p:txBody>
-          <a:bodyPr rtlCol="0" anchor="ctr"/>
-          <a:lstStyle/>
-          <a:p>
-            <a:pPr algn="ctr"/>
-          </a:p>
-        </p:txBody>
-      </p:sp>
-      <p:sp>
-        <p:nvSpPr>
-          <p:cNvPr id="39" name="Rectangle 38"/>
-          <p:cNvSpPr/>
-          <p:nvPr/>
-        </p:nvSpPr>
-        <p:spPr>
-          <a:xfrm>
-            <a:off x="457200" y="5330952"/>
-            <a:ext cx="457200" cy="859536"/>
-          </a:xfrm>
-          <a:prstGeom prst="rect">
-            <a:avLst/>
-          </a:prstGeom>
-          <a:solidFill>
-            <a:srgbClr val="C8963C"/>
-          </a:solidFill>
-          <a:ln>
-            <a:noFill/>
-          </a:ln>
-        </p:spPr>
-        <p:style>
-          <a:lnRef idx="1">
-            <a:schemeClr val="accent1"/>
-          </a:lnRef>
-          <a:fillRef idx="3">
-            <a:schemeClr val="accent1"/>
-          </a:fillRef>
-          <a:effectRef idx="2">
-            <a:schemeClr val="accent1"/>
-          </a:effectRef>
-          <a:fontRef idx="minor">
-            <a:schemeClr val="lt1"/>
-          </a:fontRef>
-        </p:style>
-        <p:txBody>
-          <a:bodyPr rtlCol="0" anchor="ctr"/>
-          <a:lstStyle/>
-          <a:p>
-            <a:pPr algn="ctr"/>
-          </a:p>
-        </p:txBody>
-      </p:sp>
-      <p:sp>
-        <p:nvSpPr>
-          <p:cNvPr id="40" name="TextBox 39"/>
-          <p:cNvSpPr txBox="1"/>
-          <p:nvPr/>
-        </p:nvSpPr>
-        <p:spPr>
-          <a:xfrm>
-            <a:off x="457200" y="5586984"/>
-            <a:ext cx="457200" cy="329184"/>
-          </a:xfrm>
-          <a:prstGeom prst="rect">
-            <a:avLst/>
-          </a:prstGeom>
-          <a:noFill/>
-        </p:spPr>
-        <p:txBody>
-          <a:bodyPr wrap="square">
-            <a:spAutoFit/>
-          </a:bodyPr>
-          <a:lstStyle/>
-          <a:p>
-            <a:pPr algn="ctr"/>
-            <a:r>
-              <a:rPr sz="1100" b="1" i="0">
-                <a:solidFill>
-                  <a:srgbClr val="1A120B"/>
-                </a:solidFill>
-              </a:rPr>
-              <a:t>中</a:t>
-            </a:r>
-          </a:p>
-        </p:txBody>
-      </p:sp>
-      <p:sp>
-        <p:nvSpPr>
-          <p:cNvPr id="41" name="TextBox 40"/>
-          <p:cNvSpPr txBox="1"/>
-          <p:nvPr/>
-        </p:nvSpPr>
-        <p:spPr>
-          <a:xfrm>
-            <a:off x="1005840" y="5376672"/>
-            <a:ext cx="2743200" cy="347472"/>
-          </a:xfrm>
-          <a:prstGeom prst="rect">
-            <a:avLst/>
-          </a:prstGeom>
-          <a:noFill/>
-        </p:spPr>
-        <p:txBody>
-          <a:bodyPr wrap="square">
-            <a:spAutoFit/>
-          </a:bodyPr>
-          <a:lstStyle/>
-          <a:p>
-            <a:pPr algn="l"/>
-            <a:r>
-              <a:rPr sz="1300" b="1" i="0">
-                <a:solidFill>
-                  <a:srgbClr val="FFFFFF"/>
-                </a:solidFill>
-              </a:rPr>
-              <a:t>⑤ FC加盟者の品質管理</a:t>
-            </a:r>
-          </a:p>
-        </p:txBody>
-      </p:sp>
-      <p:sp>
-        <p:nvSpPr>
-          <p:cNvPr id="42" name="TextBox 41"/>
-          <p:cNvSpPr txBox="1"/>
-          <p:nvPr/>
-        </p:nvSpPr>
-        <p:spPr>
-          <a:xfrm>
-            <a:off x="1005840" y="5769864"/>
-            <a:ext cx="2743200" cy="347472"/>
-          </a:xfrm>
-          <a:prstGeom prst="rect">
-            <a:avLst/>
-          </a:prstGeom>
-          <a:noFill/>
-        </p:spPr>
-        <p:txBody>
-          <a:bodyPr wrap="square">
-            <a:spAutoFit/>
-          </a:bodyPr>
-          <a:lstStyle/>
-          <a:p>
-            <a:pPr algn="l"/>
-            <a:r>
-              <a:rPr sz="1100" b="0" i="1">
-                <a:solidFill>
-                  <a:srgbClr val="8A7A6A"/>
-                </a:solidFill>
-              </a:rPr>
-              <a:t>FC展開後のQSCばらつき</a:t>
-            </a:r>
-          </a:p>
-        </p:txBody>
-      </p:sp>
-      <p:sp>
-        <p:nvSpPr>
-          <p:cNvPr id="43" name="Rectangle 42"/>
-          <p:cNvSpPr/>
-          <p:nvPr/>
-        </p:nvSpPr>
-        <p:spPr>
-          <a:xfrm>
-            <a:off x="3931920" y="5404104"/>
-            <a:ext cx="457200" cy="256032"/>
-          </a:xfrm>
-          <a:prstGeom prst="rect">
-            <a:avLst/>
-          </a:prstGeom>
-          <a:solidFill>
-            <a:srgbClr val="C8963C"/>
-          </a:solidFill>
-          <a:ln>
-            <a:noFill/>
-          </a:ln>
-        </p:spPr>
-        <p:style>
-          <a:lnRef idx="1">
-            <a:schemeClr val="accent1"/>
-          </a:lnRef>
-          <a:fillRef idx="3">
-            <a:schemeClr val="accent1"/>
-          </a:fillRef>
-          <a:effectRef idx="2">
-            <a:schemeClr val="accent1"/>
-          </a:effectRef>
-          <a:fontRef idx="minor">
-            <a:schemeClr val="lt1"/>
-          </a:fontRef>
-        </p:style>
-        <p:txBody>
-          <a:bodyPr rtlCol="0" anchor="ctr"/>
-          <a:lstStyle/>
-          <a:p>
-            <a:pPr algn="ctr"/>
-          </a:p>
-        </p:txBody>
-      </p:sp>
-      <p:sp>
-        <p:nvSpPr>
-          <p:cNvPr id="44" name="TextBox 43"/>
-          <p:cNvSpPr txBox="1"/>
-          <p:nvPr/>
-        </p:nvSpPr>
-        <p:spPr>
-          <a:xfrm>
-            <a:off x="3931920" y="5404104"/>
-            <a:ext cx="457200" cy="256032"/>
-          </a:xfrm>
-          <a:prstGeom prst="rect">
-            <a:avLst/>
-          </a:prstGeom>
-          <a:noFill/>
-        </p:spPr>
-        <p:txBody>
-          <a:bodyPr wrap="square">
-            <a:spAutoFit/>
-          </a:bodyPr>
-          <a:lstStyle/>
-          <a:p>
-            <a:pPr algn="ctr"/>
-            <a:r>
-              <a:rPr sz="900" b="1" i="0">
-                <a:solidFill>
-                  <a:srgbClr val="1A120B"/>
-                </a:solidFill>
-              </a:rPr>
-              <a:t>対策</a:t>
-            </a:r>
-          </a:p>
-        </p:txBody>
-      </p:sp>
-      <p:sp>
-        <p:nvSpPr>
-          <p:cNvPr id="45" name="TextBox 44"/>
-          <p:cNvSpPr txBox="1"/>
-          <p:nvPr/>
-        </p:nvSpPr>
-        <p:spPr>
-          <a:xfrm>
-            <a:off x="4480560" y="5376672"/>
-            <a:ext cx="7040880" cy="768096"/>
-          </a:xfrm>
-          <a:prstGeom prst="rect">
-            <a:avLst/>
-          </a:prstGeom>
-          <a:noFill/>
-        </p:spPr>
-        <p:txBody>
-          <a:bodyPr wrap="square">
-            <a:spAutoFit/>
-          </a:bodyPr>
-          <a:lstStyle/>
-          <a:p>
-            <a:pPr algn="l"/>
-            <a:r>
-              <a:rPr sz="1100" b="0" i="0">
-                <a:solidFill>
-                  <a:srgbClr val="F0E6D3"/>
-                </a:solidFill>
-              </a:rPr>
-              <a:t>SV定期巡回（月1回以上）・抜き打ち覆面調査の実施。
-数値基準を下回る店舗には改善プログラムを発動。</a:t>
-            </a:r>
-          </a:p>
-        </p:txBody>
-      </p:sp>
-      <p:sp>
-        <p:nvSpPr>
-          <p:cNvPr id="46" name="TextBox 45"/>
+              <a:t>※ 企業価値はPER25倍で試算（外食FC上場企業の参考値）。月商720万円/店・稼働率100%を前提とした最大値シナリオ。</a:t>
+            </a:r>
+          </a:p>
+        </p:txBody>
+      </p:sp>
+      <p:sp>
+        <p:nvSpPr>
+          <p:cNvPr id="22" name="TextBox 21"/>
           <p:cNvSpPr txBox="1"/>
           <p:nvPr/>
         </p:nvSpPr>
@@ -19118,7 +18169,7 @@
                   <a:srgbClr val="8A7A6A"/>
                 </a:solidFill>
               </a:rPr>
-              <a:t>19 / 20</a:t>
+              <a:t>19 / 21</a:t>
             </a:r>
           </a:p>
         </p:txBody>
@@ -19221,7 +18272,7 @@
                   <a:srgbClr val="C8963C"/>
                 </a:solidFill>
               </a:rPr>
-              <a:t>ACTION PLAN</a:t>
+              <a:t>RISK MANAGEMENT</a:t>
             </a:r>
           </a:p>
         </p:txBody>
@@ -19255,7 +18306,7 @@
                   <a:srgbClr val="FFFFFF"/>
                 </a:solidFill>
               </a:rPr>
-              <a:t>今後90日のアクションプラン</a:t>
+              <a:t>リスクと対策　――　想定して備える</a:t>
             </a:r>
           </a:p>
         </p:txBody>
@@ -19312,118 +18363,7 @@
         <p:spPr>
           <a:xfrm>
             <a:off x="457200" y="1600200"/>
-            <a:ext cx="3657600" cy="384048"/>
-          </a:xfrm>
-          <a:prstGeom prst="rect">
-            <a:avLst/>
-          </a:prstGeom>
-          <a:solidFill>
-            <a:srgbClr val="3A2A08"/>
-          </a:solidFill>
-          <a:ln>
-            <a:noFill/>
-          </a:ln>
-        </p:spPr>
-        <p:style>
-          <a:lnRef idx="1">
-            <a:schemeClr val="accent1"/>
-          </a:lnRef>
-          <a:fillRef idx="3">
-            <a:schemeClr val="accent1"/>
-          </a:fillRef>
-          <a:effectRef idx="2">
-            <a:schemeClr val="accent1"/>
-          </a:effectRef>
-          <a:fontRef idx="minor">
-            <a:schemeClr val="lt1"/>
-          </a:fontRef>
-        </p:style>
-        <p:txBody>
-          <a:bodyPr rtlCol="0" anchor="ctr"/>
-          <a:lstStyle/>
-          <a:p>
-            <a:pPr algn="ctr"/>
-          </a:p>
-        </p:txBody>
-      </p:sp>
-      <p:sp>
-        <p:nvSpPr>
-          <p:cNvPr id="7" name="TextBox 6"/>
-          <p:cNvSpPr txBox="1"/>
-          <p:nvPr/>
-        </p:nvSpPr>
-        <p:spPr>
-          <a:xfrm>
-            <a:off x="548640" y="1627632"/>
-            <a:ext cx="1371600" cy="329184"/>
-          </a:xfrm>
-          <a:prstGeom prst="rect">
-            <a:avLst/>
-          </a:prstGeom>
-          <a:noFill/>
-        </p:spPr>
-        <p:txBody>
-          <a:bodyPr wrap="square">
-            <a:spAutoFit/>
-          </a:bodyPr>
-          <a:lstStyle/>
-          <a:p>
-            <a:pPr algn="l"/>
-            <a:r>
-              <a:rPr sz="1200" b="1" i="0">
-                <a:solidFill>
-                  <a:srgbClr val="C8963C"/>
-                </a:solidFill>
-              </a:rPr>
-              <a:t>0〜30日</a:t>
-            </a:r>
-          </a:p>
-        </p:txBody>
-      </p:sp>
-      <p:sp>
-        <p:nvSpPr>
-          <p:cNvPr id="8" name="TextBox 7"/>
-          <p:cNvSpPr txBox="1"/>
-          <p:nvPr/>
-        </p:nvSpPr>
-        <p:spPr>
-          <a:xfrm>
-            <a:off x="1920240" y="1627632"/>
-            <a:ext cx="2011680" cy="329184"/>
-          </a:xfrm>
-          <a:prstGeom prst="rect">
-            <a:avLst/>
-          </a:prstGeom>
-          <a:noFill/>
-        </p:spPr>
-        <p:txBody>
-          <a:bodyPr wrap="square">
-            <a:spAutoFit/>
-          </a:bodyPr>
-          <a:lstStyle/>
-          <a:p>
-            <a:pPr algn="l"/>
-            <a:r>
-              <a:rPr sz="1100" b="0" i="0">
-                <a:solidFill>
-                  <a:srgbClr val="FFFFFF"/>
-                </a:solidFill>
-              </a:rPr>
-              <a:t>仕込みと準備</a:t>
-            </a:r>
-          </a:p>
-        </p:txBody>
-      </p:sp>
-      <p:sp>
-        <p:nvSpPr>
-          <p:cNvPr id="9" name="Rectangle 8"/>
-          <p:cNvSpPr/>
-          <p:nvPr/>
-        </p:nvSpPr>
-        <p:spPr>
-          <a:xfrm>
-            <a:off x="457200" y="1984248"/>
-            <a:ext cx="3657600" cy="4206240"/>
+            <a:ext cx="11247120" cy="859536"/>
           </a:xfrm>
           <a:prstGeom prst="rect">
             <a:avLst/>
@@ -19459,190 +18399,20 @@
       </p:sp>
       <p:sp>
         <p:nvSpPr>
-          <p:cNvPr id="10" name="TextBox 9"/>
-          <p:cNvSpPr txBox="1"/>
-          <p:nvPr/>
-        </p:nvSpPr>
-        <p:spPr>
-          <a:xfrm>
-            <a:off x="594360" y="2084831"/>
-            <a:ext cx="3383280" cy="694944"/>
-          </a:xfrm>
-          <a:prstGeom prst="rect">
-            <a:avLst/>
-          </a:prstGeom>
-          <a:noFill/>
-        </p:spPr>
-        <p:txBody>
-          <a:bodyPr wrap="square">
-            <a:spAutoFit/>
-          </a:bodyPr>
-          <a:lstStyle/>
-          <a:p>
-            <a:pPr algn="l"/>
-            <a:r>
-              <a:rPr sz="1200" b="0" i="0">
-                <a:solidFill>
-                  <a:srgbClr val="F0E6D3"/>
-                </a:solidFill>
-              </a:rPr>
-              <a:t>□ 会社設立（登記・口座開設）</a:t>
-            </a:r>
-          </a:p>
-        </p:txBody>
-      </p:sp>
-      <p:sp>
-        <p:nvSpPr>
-          <p:cNvPr id="11" name="TextBox 10"/>
-          <p:cNvSpPr txBox="1"/>
-          <p:nvPr/>
-        </p:nvSpPr>
-        <p:spPr>
-          <a:xfrm>
-            <a:off x="594360" y="2852927"/>
-            <a:ext cx="3383280" cy="694944"/>
-          </a:xfrm>
-          <a:prstGeom prst="rect">
-            <a:avLst/>
-          </a:prstGeom>
-          <a:noFill/>
-        </p:spPr>
-        <p:txBody>
-          <a:bodyPr wrap="square">
-            <a:spAutoFit/>
-          </a:bodyPr>
-          <a:lstStyle/>
-          <a:p>
-            <a:pPr algn="l"/>
-            <a:r>
-              <a:rPr sz="1200" b="0" i="0">
-                <a:solidFill>
-                  <a:srgbClr val="F0E6D3"/>
-                </a:solidFill>
-              </a:rPr>
-              <a:t>□ 「肉酒場 然」商標調査・出願</a:t>
-            </a:r>
-          </a:p>
-        </p:txBody>
-      </p:sp>
-      <p:sp>
-        <p:nvSpPr>
-          <p:cNvPr id="12" name="TextBox 11"/>
-          <p:cNvSpPr txBox="1"/>
-          <p:nvPr/>
-        </p:nvSpPr>
-        <p:spPr>
-          <a:xfrm>
-            <a:off x="594360" y="3621024"/>
-            <a:ext cx="3383280" cy="694944"/>
-          </a:xfrm>
-          <a:prstGeom prst="rect">
-            <a:avLst/>
-          </a:prstGeom>
-          <a:noFill/>
-        </p:spPr>
-        <p:txBody>
-          <a:bodyPr wrap="square">
-            <a:spAutoFit/>
-          </a:bodyPr>
-          <a:lstStyle/>
-          <a:p>
-            <a:pPr algn="l"/>
-            <a:r>
-              <a:rPr sz="1200" b="0" i="0">
-                <a:solidFill>
-                  <a:srgbClr val="F0E6D3"/>
-                </a:solidFill>
-              </a:rPr>
-              <a:t>□ 物件情報収集（三軒茶屋・目黒・自由が丘）</a:t>
-            </a:r>
-          </a:p>
-        </p:txBody>
-      </p:sp>
-      <p:sp>
-        <p:nvSpPr>
-          <p:cNvPr id="13" name="TextBox 12"/>
-          <p:cNvSpPr txBox="1"/>
-          <p:nvPr/>
-        </p:nvSpPr>
-        <p:spPr>
-          <a:xfrm>
-            <a:off x="594360" y="4389120"/>
-            <a:ext cx="3383280" cy="694944"/>
-          </a:xfrm>
-          <a:prstGeom prst="rect">
-            <a:avLst/>
-          </a:prstGeom>
-          <a:noFill/>
-        </p:spPr>
-        <p:txBody>
-          <a:bodyPr wrap="square">
-            <a:spAutoFit/>
-          </a:bodyPr>
-          <a:lstStyle/>
-          <a:p>
-            <a:pPr algn="l"/>
-            <a:r>
-              <a:rPr sz="1200" b="0" i="0">
-                <a:solidFill>
-                  <a:srgbClr val="F0E6D3"/>
-                </a:solidFill>
-              </a:rPr>
-              <a:t>□ 日本政策金融公庫への相談・申込</a:t>
-            </a:r>
-          </a:p>
-        </p:txBody>
-      </p:sp>
-      <p:sp>
-        <p:nvSpPr>
-          <p:cNvPr id="14" name="TextBox 13"/>
-          <p:cNvSpPr txBox="1"/>
-          <p:nvPr/>
-        </p:nvSpPr>
-        <p:spPr>
-          <a:xfrm>
-            <a:off x="594360" y="5157216"/>
-            <a:ext cx="3383280" cy="694944"/>
-          </a:xfrm>
-          <a:prstGeom prst="rect">
-            <a:avLst/>
-          </a:prstGeom>
-          <a:noFill/>
-        </p:spPr>
-        <p:txBody>
-          <a:bodyPr wrap="square">
-            <a:spAutoFit/>
-          </a:bodyPr>
-          <a:lstStyle/>
-          <a:p>
-            <a:pPr algn="l"/>
-            <a:r>
-              <a:rPr sz="1200" b="0" i="0">
-                <a:solidFill>
-                  <a:srgbClr val="F0E6D3"/>
-                </a:solidFill>
-              </a:rPr>
-              <a:t>□ Instagramアカウント開設</a:t>
-            </a:r>
-          </a:p>
-        </p:txBody>
-      </p:sp>
-      <p:sp>
-        <p:nvSpPr>
-          <p:cNvPr id="15" name="Rectangle 14"/>
+          <p:cNvPr id="7" name="Rectangle 6"/>
           <p:cNvSpPr/>
           <p:nvPr/>
         </p:nvSpPr>
         <p:spPr>
           <a:xfrm>
-            <a:off x="4343400" y="1600200"/>
-            <a:ext cx="3657600" cy="384048"/>
+            <a:off x="457200" y="1600200"/>
+            <a:ext cx="457200" cy="859536"/>
           </a:xfrm>
           <a:prstGeom prst="rect">
             <a:avLst/>
           </a:prstGeom>
           <a:solidFill>
-            <a:srgbClr val="3A2805"/>
+            <a:srgbClr val="C0392B"/>
           </a:solidFill>
           <a:ln>
             <a:noFill/>
@@ -19672,48 +18442,193 @@
       </p:sp>
       <p:sp>
         <p:nvSpPr>
-          <p:cNvPr id="16" name="TextBox 15"/>
-          <p:cNvSpPr txBox="1"/>
-          <p:nvPr/>
-        </p:nvSpPr>
-        <p:spPr>
-          <a:xfrm>
-            <a:off x="4434840" y="1627632"/>
-            <a:ext cx="1371600" cy="329184"/>
-          </a:xfrm>
-          <a:prstGeom prst="rect">
-            <a:avLst/>
-          </a:prstGeom>
-          <a:noFill/>
-        </p:spPr>
-        <p:txBody>
-          <a:bodyPr wrap="square">
-            <a:spAutoFit/>
-          </a:bodyPr>
-          <a:lstStyle/>
-          <a:p>
-            <a:pPr algn="l"/>
-            <a:r>
-              <a:rPr sz="1200" b="1" i="0">
-                <a:solidFill>
-                  <a:srgbClr val="C8963C"/>
-                </a:solidFill>
-              </a:rPr>
-              <a:t>30〜60日</a:t>
-            </a:r>
-          </a:p>
-        </p:txBody>
-      </p:sp>
-      <p:sp>
-        <p:nvSpPr>
-          <p:cNvPr id="17" name="TextBox 16"/>
-          <p:cNvSpPr txBox="1"/>
-          <p:nvPr/>
-        </p:nvSpPr>
-        <p:spPr>
-          <a:xfrm>
-            <a:off x="5806440" y="1627632"/>
-            <a:ext cx="2011680" cy="329184"/>
+          <p:cNvPr id="8" name="TextBox 7"/>
+          <p:cNvSpPr txBox="1"/>
+          <p:nvPr/>
+        </p:nvSpPr>
+        <p:spPr>
+          <a:xfrm>
+            <a:off x="457200" y="1856232"/>
+            <a:ext cx="457200" cy="329184"/>
+          </a:xfrm>
+          <a:prstGeom prst="rect">
+            <a:avLst/>
+          </a:prstGeom>
+          <a:noFill/>
+        </p:spPr>
+        <p:txBody>
+          <a:bodyPr wrap="square">
+            <a:spAutoFit/>
+          </a:bodyPr>
+          <a:lstStyle/>
+          <a:p>
+            <a:pPr algn="ctr"/>
+            <a:r>
+              <a:rPr sz="1100" b="1" i="0">
+                <a:solidFill>
+                  <a:srgbClr val="1A120B"/>
+                </a:solidFill>
+              </a:rPr>
+              <a:t>高</a:t>
+            </a:r>
+          </a:p>
+        </p:txBody>
+      </p:sp>
+      <p:sp>
+        <p:nvSpPr>
+          <p:cNvPr id="9" name="TextBox 8"/>
+          <p:cNvSpPr txBox="1"/>
+          <p:nvPr/>
+        </p:nvSpPr>
+        <p:spPr>
+          <a:xfrm>
+            <a:off x="1005840" y="1645920"/>
+            <a:ext cx="2743200" cy="347472"/>
+          </a:xfrm>
+          <a:prstGeom prst="rect">
+            <a:avLst/>
+          </a:prstGeom>
+          <a:noFill/>
+        </p:spPr>
+        <p:txBody>
+          <a:bodyPr wrap="square">
+            <a:spAutoFit/>
+          </a:bodyPr>
+          <a:lstStyle/>
+          <a:p>
+            <a:pPr algn="l"/>
+            <a:r>
+              <a:rPr sz="1300" b="1" i="0">
+                <a:solidFill>
+                  <a:srgbClr val="FFFFFF"/>
+                </a:solidFill>
+              </a:rPr>
+              <a:t>① 立ち上げ期の売上未達</a:t>
+            </a:r>
+          </a:p>
+        </p:txBody>
+      </p:sp>
+      <p:sp>
+        <p:nvSpPr>
+          <p:cNvPr id="10" name="TextBox 9"/>
+          <p:cNvSpPr txBox="1"/>
+          <p:nvPr/>
+        </p:nvSpPr>
+        <p:spPr>
+          <a:xfrm>
+            <a:off x="1005840" y="2039112"/>
+            <a:ext cx="2743200" cy="347472"/>
+          </a:xfrm>
+          <a:prstGeom prst="rect">
+            <a:avLst/>
+          </a:prstGeom>
+          <a:noFill/>
+        </p:spPr>
+        <p:txBody>
+          <a:bodyPr wrap="square">
+            <a:spAutoFit/>
+          </a:bodyPr>
+          <a:lstStyle/>
+          <a:p>
+            <a:pPr algn="l"/>
+            <a:r>
+              <a:rPr sz="1100" b="0" i="1">
+                <a:solidFill>
+                  <a:srgbClr val="8A7A6A"/>
+                </a:solidFill>
+              </a:rPr>
+              <a:t>新店認知不足・口コミ形成に時間</a:t>
+            </a:r>
+          </a:p>
+        </p:txBody>
+      </p:sp>
+      <p:sp>
+        <p:nvSpPr>
+          <p:cNvPr id="11" name="Rectangle 10"/>
+          <p:cNvSpPr/>
+          <p:nvPr/>
+        </p:nvSpPr>
+        <p:spPr>
+          <a:xfrm>
+            <a:off x="3931920" y="1673352"/>
+            <a:ext cx="457200" cy="256032"/>
+          </a:xfrm>
+          <a:prstGeom prst="rect">
+            <a:avLst/>
+          </a:prstGeom>
+          <a:solidFill>
+            <a:srgbClr val="C8963C"/>
+          </a:solidFill>
+          <a:ln>
+            <a:noFill/>
+          </a:ln>
+        </p:spPr>
+        <p:style>
+          <a:lnRef idx="1">
+            <a:schemeClr val="accent1"/>
+          </a:lnRef>
+          <a:fillRef idx="3">
+            <a:schemeClr val="accent1"/>
+          </a:fillRef>
+          <a:effectRef idx="2">
+            <a:schemeClr val="accent1"/>
+          </a:effectRef>
+          <a:fontRef idx="minor">
+            <a:schemeClr val="lt1"/>
+          </a:fontRef>
+        </p:style>
+        <p:txBody>
+          <a:bodyPr rtlCol="0" anchor="ctr"/>
+          <a:lstStyle/>
+          <a:p>
+            <a:pPr algn="ctr"/>
+          </a:p>
+        </p:txBody>
+      </p:sp>
+      <p:sp>
+        <p:nvSpPr>
+          <p:cNvPr id="12" name="TextBox 11"/>
+          <p:cNvSpPr txBox="1"/>
+          <p:nvPr/>
+        </p:nvSpPr>
+        <p:spPr>
+          <a:xfrm>
+            <a:off x="3931920" y="1673352"/>
+            <a:ext cx="457200" cy="256032"/>
+          </a:xfrm>
+          <a:prstGeom prst="rect">
+            <a:avLst/>
+          </a:prstGeom>
+          <a:noFill/>
+        </p:spPr>
+        <p:txBody>
+          <a:bodyPr wrap="square">
+            <a:spAutoFit/>
+          </a:bodyPr>
+          <a:lstStyle/>
+          <a:p>
+            <a:pPr algn="ctr"/>
+            <a:r>
+              <a:rPr sz="900" b="1" i="0">
+                <a:solidFill>
+                  <a:srgbClr val="1A120B"/>
+                </a:solidFill>
+              </a:rPr>
+              <a:t>対策</a:t>
+            </a:r>
+          </a:p>
+        </p:txBody>
+      </p:sp>
+      <p:sp>
+        <p:nvSpPr>
+          <p:cNvPr id="13" name="TextBox 12"/>
+          <p:cNvSpPr txBox="1"/>
+          <p:nvPr/>
+        </p:nvSpPr>
+        <p:spPr>
+          <a:xfrm>
+            <a:off x="4480560" y="1645920"/>
+            <a:ext cx="7040880" cy="768096"/>
           </a:xfrm>
           <a:prstGeom prst="rect">
             <a:avLst/>
@@ -19730,24 +18645,25 @@
             <a:r>
               <a:rPr sz="1100" b="0" i="0">
                 <a:solidFill>
-                  <a:srgbClr val="FFFFFF"/>
-                </a:solidFill>
-              </a:rPr>
-              <a:t>物件決定と資金確定</a:t>
-            </a:r>
-          </a:p>
-        </p:txBody>
-      </p:sp>
-      <p:sp>
-        <p:nvSpPr>
-          <p:cNvPr id="18" name="Rectangle 17"/>
+                  <a:srgbClr val="F0E6D3"/>
+                </a:solidFill>
+              </a:rPr>
+              <a:t>開業3ヶ月前からインフルエンサー戦略を実行。
+手元残金630万円で最大6ヶ月の赤字に耐えられる財務設計。</a:t>
+            </a:r>
+          </a:p>
+        </p:txBody>
+      </p:sp>
+      <p:sp>
+        <p:nvSpPr>
+          <p:cNvPr id="14" name="Rectangle 13"/>
           <p:cNvSpPr/>
           <p:nvPr/>
         </p:nvSpPr>
         <p:spPr>
           <a:xfrm>
-            <a:off x="4343400" y="1984248"/>
-            <a:ext cx="3657600" cy="4206240"/>
+            <a:off x="457200" y="2532888"/>
+            <a:ext cx="11247120" cy="859536"/>
           </a:xfrm>
           <a:prstGeom prst="rect">
             <a:avLst/>
@@ -19783,190 +18699,20 @@
       </p:sp>
       <p:sp>
         <p:nvSpPr>
-          <p:cNvPr id="19" name="TextBox 18"/>
-          <p:cNvSpPr txBox="1"/>
-          <p:nvPr/>
-        </p:nvSpPr>
-        <p:spPr>
-          <a:xfrm>
-            <a:off x="4480560" y="2084831"/>
-            <a:ext cx="3383280" cy="694944"/>
-          </a:xfrm>
-          <a:prstGeom prst="rect">
-            <a:avLst/>
-          </a:prstGeom>
-          <a:noFill/>
-        </p:spPr>
-        <p:txBody>
-          <a:bodyPr wrap="square">
-            <a:spAutoFit/>
-          </a:bodyPr>
-          <a:lstStyle/>
-          <a:p>
-            <a:pPr algn="l"/>
-            <a:r>
-              <a:rPr sz="1200" b="0" i="0">
-                <a:solidFill>
-                  <a:srgbClr val="F0E6D3"/>
-                </a:solidFill>
-              </a:rPr>
-              <a:t>□ 物件内見・スコアリング評価</a:t>
-            </a:r>
-          </a:p>
-        </p:txBody>
-      </p:sp>
-      <p:sp>
-        <p:nvSpPr>
-          <p:cNvPr id="20" name="TextBox 19"/>
-          <p:cNvSpPr txBox="1"/>
-          <p:nvPr/>
-        </p:nvSpPr>
-        <p:spPr>
-          <a:xfrm>
-            <a:off x="4480560" y="2852927"/>
-            <a:ext cx="3383280" cy="694944"/>
-          </a:xfrm>
-          <a:prstGeom prst="rect">
-            <a:avLst/>
-          </a:prstGeom>
-          <a:noFill/>
-        </p:spPr>
-        <p:txBody>
-          <a:bodyPr wrap="square">
-            <a:spAutoFit/>
-          </a:bodyPr>
-          <a:lstStyle/>
-          <a:p>
-            <a:pPr algn="l"/>
-            <a:r>
-              <a:rPr sz="1200" b="0" i="0">
-                <a:solidFill>
-                  <a:srgbClr val="F0E6D3"/>
-                </a:solidFill>
-              </a:rPr>
-              <a:t>□ 公庫面談・融資確定</a:t>
-            </a:r>
-          </a:p>
-        </p:txBody>
-      </p:sp>
-      <p:sp>
-        <p:nvSpPr>
-          <p:cNvPr id="21" name="TextBox 20"/>
-          <p:cNvSpPr txBox="1"/>
-          <p:nvPr/>
-        </p:nvSpPr>
-        <p:spPr>
-          <a:xfrm>
-            <a:off x="4480560" y="3621024"/>
-            <a:ext cx="3383280" cy="694944"/>
-          </a:xfrm>
-          <a:prstGeom prst="rect">
-            <a:avLst/>
-          </a:prstGeom>
-          <a:noFill/>
-        </p:spPr>
-        <p:txBody>
-          <a:bodyPr wrap="square">
-            <a:spAutoFit/>
-          </a:bodyPr>
-          <a:lstStyle/>
-          <a:p>
-            <a:pPr algn="l"/>
-            <a:r>
-              <a:rPr sz="1200" b="0" i="0">
-                <a:solidFill>
-                  <a:srgbClr val="F0E6D3"/>
-                </a:solidFill>
-              </a:rPr>
-              <a:t>□ 物件契約・内装業者選定</a:t>
-            </a:r>
-          </a:p>
-        </p:txBody>
-      </p:sp>
-      <p:sp>
-        <p:nvSpPr>
-          <p:cNvPr id="22" name="TextBox 21"/>
-          <p:cNvSpPr txBox="1"/>
-          <p:nvPr/>
-        </p:nvSpPr>
-        <p:spPr>
-          <a:xfrm>
-            <a:off x="4480560" y="4389120"/>
-            <a:ext cx="3383280" cy="694944"/>
-          </a:xfrm>
-          <a:prstGeom prst="rect">
-            <a:avLst/>
-          </a:prstGeom>
-          <a:noFill/>
-        </p:spPr>
-        <p:txBody>
-          <a:bodyPr wrap="square">
-            <a:spAutoFit/>
-          </a:bodyPr>
-          <a:lstStyle/>
-          <a:p>
-            <a:pPr algn="l"/>
-            <a:r>
-              <a:rPr sz="1200" b="0" i="0">
-                <a:solidFill>
-                  <a:srgbClr val="F0E6D3"/>
-                </a:solidFill>
-              </a:rPr>
-              <a:t>□ インフルエンサーリスト作成（50名）</a:t>
-            </a:r>
-          </a:p>
-        </p:txBody>
-      </p:sp>
-      <p:sp>
-        <p:nvSpPr>
-          <p:cNvPr id="23" name="TextBox 22"/>
-          <p:cNvSpPr txBox="1"/>
-          <p:nvPr/>
-        </p:nvSpPr>
-        <p:spPr>
-          <a:xfrm>
-            <a:off x="4480560" y="5157216"/>
-            <a:ext cx="3383280" cy="694944"/>
-          </a:xfrm>
-          <a:prstGeom prst="rect">
-            <a:avLst/>
-          </a:prstGeom>
-          <a:noFill/>
-        </p:spPr>
-        <p:txBody>
-          <a:bodyPr wrap="square">
-            <a:spAutoFit/>
-          </a:bodyPr>
-          <a:lstStyle/>
-          <a:p>
-            <a:pPr algn="l"/>
-            <a:r>
-              <a:rPr sz="1200" b="0" i="0">
-                <a:solidFill>
-                  <a:srgbClr val="F0E6D3"/>
-                </a:solidFill>
-              </a:rPr>
-              <a:t>□ メニュー最終試作・原価計算確定</a:t>
-            </a:r>
-          </a:p>
-        </p:txBody>
-      </p:sp>
-      <p:sp>
-        <p:nvSpPr>
-          <p:cNvPr id="24" name="Rectangle 23"/>
+          <p:cNvPr id="15" name="Rectangle 14"/>
           <p:cNvSpPr/>
           <p:nvPr/>
         </p:nvSpPr>
         <p:spPr>
           <a:xfrm>
-            <a:off x="8229600" y="1600200"/>
-            <a:ext cx="3657600" cy="384048"/>
+            <a:off x="457200" y="2532888"/>
+            <a:ext cx="457200" cy="859536"/>
           </a:xfrm>
           <a:prstGeom prst="rect">
             <a:avLst/>
           </a:prstGeom>
           <a:solidFill>
-            <a:srgbClr val="3A2E08"/>
+            <a:srgbClr val="C8963C"/>
           </a:solidFill>
           <a:ln>
             <a:noFill/>
@@ -19996,48 +18742,193 @@
       </p:sp>
       <p:sp>
         <p:nvSpPr>
-          <p:cNvPr id="25" name="TextBox 24"/>
-          <p:cNvSpPr txBox="1"/>
-          <p:nvPr/>
-        </p:nvSpPr>
-        <p:spPr>
-          <a:xfrm>
-            <a:off x="8321040" y="1627632"/>
-            <a:ext cx="1371600" cy="329184"/>
-          </a:xfrm>
-          <a:prstGeom prst="rect">
-            <a:avLst/>
-          </a:prstGeom>
-          <a:noFill/>
-        </p:spPr>
-        <p:txBody>
-          <a:bodyPr wrap="square">
-            <a:spAutoFit/>
-          </a:bodyPr>
-          <a:lstStyle/>
-          <a:p>
-            <a:pPr algn="l"/>
-            <a:r>
-              <a:rPr sz="1200" b="1" i="0">
-                <a:solidFill>
-                  <a:srgbClr val="C8963C"/>
-                </a:solidFill>
-              </a:rPr>
-              <a:t>60〜90日</a:t>
-            </a:r>
-          </a:p>
-        </p:txBody>
-      </p:sp>
-      <p:sp>
-        <p:nvSpPr>
-          <p:cNvPr id="26" name="TextBox 25"/>
-          <p:cNvSpPr txBox="1"/>
-          <p:nvPr/>
-        </p:nvSpPr>
-        <p:spPr>
-          <a:xfrm>
-            <a:off x="9692640" y="1627632"/>
-            <a:ext cx="2011680" cy="329184"/>
+          <p:cNvPr id="16" name="TextBox 15"/>
+          <p:cNvSpPr txBox="1"/>
+          <p:nvPr/>
+        </p:nvSpPr>
+        <p:spPr>
+          <a:xfrm>
+            <a:off x="457200" y="2788920"/>
+            <a:ext cx="457200" cy="329184"/>
+          </a:xfrm>
+          <a:prstGeom prst="rect">
+            <a:avLst/>
+          </a:prstGeom>
+          <a:noFill/>
+        </p:spPr>
+        <p:txBody>
+          <a:bodyPr wrap="square">
+            <a:spAutoFit/>
+          </a:bodyPr>
+          <a:lstStyle/>
+          <a:p>
+            <a:pPr algn="ctr"/>
+            <a:r>
+              <a:rPr sz="1100" b="1" i="0">
+                <a:solidFill>
+                  <a:srgbClr val="1A120B"/>
+                </a:solidFill>
+              </a:rPr>
+              <a:t>中</a:t>
+            </a:r>
+          </a:p>
+        </p:txBody>
+      </p:sp>
+      <p:sp>
+        <p:nvSpPr>
+          <p:cNvPr id="17" name="TextBox 16"/>
+          <p:cNvSpPr txBox="1"/>
+          <p:nvPr/>
+        </p:nvSpPr>
+        <p:spPr>
+          <a:xfrm>
+            <a:off x="1005840" y="2578608"/>
+            <a:ext cx="2743200" cy="347472"/>
+          </a:xfrm>
+          <a:prstGeom prst="rect">
+            <a:avLst/>
+          </a:prstGeom>
+          <a:noFill/>
+        </p:spPr>
+        <p:txBody>
+          <a:bodyPr wrap="square">
+            <a:spAutoFit/>
+          </a:bodyPr>
+          <a:lstStyle/>
+          <a:p>
+            <a:pPr algn="l"/>
+            <a:r>
+              <a:rPr sz="1300" b="1" i="0">
+                <a:solidFill>
+                  <a:srgbClr val="FFFFFF"/>
+                </a:solidFill>
+              </a:rPr>
+              <a:t>② 人材採用・定着の問題</a:t>
+            </a:r>
+          </a:p>
+        </p:txBody>
+      </p:sp>
+      <p:sp>
+        <p:nvSpPr>
+          <p:cNvPr id="18" name="TextBox 17"/>
+          <p:cNvSpPr txBox="1"/>
+          <p:nvPr/>
+        </p:nvSpPr>
+        <p:spPr>
+          <a:xfrm>
+            <a:off x="1005840" y="2971800"/>
+            <a:ext cx="2743200" cy="347472"/>
+          </a:xfrm>
+          <a:prstGeom prst="rect">
+            <a:avLst/>
+          </a:prstGeom>
+          <a:noFill/>
+        </p:spPr>
+        <p:txBody>
+          <a:bodyPr wrap="square">
+            <a:spAutoFit/>
+          </a:bodyPr>
+          <a:lstStyle/>
+          <a:p>
+            <a:pPr algn="l"/>
+            <a:r>
+              <a:rPr sz="1100" b="0" i="1">
+                <a:solidFill>
+                  <a:srgbClr val="8A7A6A"/>
+                </a:solidFill>
+              </a:rPr>
+              <a:t>飲食業界の人手不足・離職率の高さ</a:t>
+            </a:r>
+          </a:p>
+        </p:txBody>
+      </p:sp>
+      <p:sp>
+        <p:nvSpPr>
+          <p:cNvPr id="19" name="Rectangle 18"/>
+          <p:cNvSpPr/>
+          <p:nvPr/>
+        </p:nvSpPr>
+        <p:spPr>
+          <a:xfrm>
+            <a:off x="3931920" y="2606040"/>
+            <a:ext cx="457200" cy="256032"/>
+          </a:xfrm>
+          <a:prstGeom prst="rect">
+            <a:avLst/>
+          </a:prstGeom>
+          <a:solidFill>
+            <a:srgbClr val="C8963C"/>
+          </a:solidFill>
+          <a:ln>
+            <a:noFill/>
+          </a:ln>
+        </p:spPr>
+        <p:style>
+          <a:lnRef idx="1">
+            <a:schemeClr val="accent1"/>
+          </a:lnRef>
+          <a:fillRef idx="3">
+            <a:schemeClr val="accent1"/>
+          </a:fillRef>
+          <a:effectRef idx="2">
+            <a:schemeClr val="accent1"/>
+          </a:effectRef>
+          <a:fontRef idx="minor">
+            <a:schemeClr val="lt1"/>
+          </a:fontRef>
+        </p:style>
+        <p:txBody>
+          <a:bodyPr rtlCol="0" anchor="ctr"/>
+          <a:lstStyle/>
+          <a:p>
+            <a:pPr algn="ctr"/>
+          </a:p>
+        </p:txBody>
+      </p:sp>
+      <p:sp>
+        <p:nvSpPr>
+          <p:cNvPr id="20" name="TextBox 19"/>
+          <p:cNvSpPr txBox="1"/>
+          <p:nvPr/>
+        </p:nvSpPr>
+        <p:spPr>
+          <a:xfrm>
+            <a:off x="3931920" y="2606040"/>
+            <a:ext cx="457200" cy="256032"/>
+          </a:xfrm>
+          <a:prstGeom prst="rect">
+            <a:avLst/>
+          </a:prstGeom>
+          <a:noFill/>
+        </p:spPr>
+        <p:txBody>
+          <a:bodyPr wrap="square">
+            <a:spAutoFit/>
+          </a:bodyPr>
+          <a:lstStyle/>
+          <a:p>
+            <a:pPr algn="ctr"/>
+            <a:r>
+              <a:rPr sz="900" b="1" i="0">
+                <a:solidFill>
+                  <a:srgbClr val="1A120B"/>
+                </a:solidFill>
+              </a:rPr>
+              <a:t>対策</a:t>
+            </a:r>
+          </a:p>
+        </p:txBody>
+      </p:sp>
+      <p:sp>
+        <p:nvSpPr>
+          <p:cNvPr id="21" name="TextBox 20"/>
+          <p:cNvSpPr txBox="1"/>
+          <p:nvPr/>
+        </p:nvSpPr>
+        <p:spPr>
+          <a:xfrm>
+            <a:off x="4480560" y="2578608"/>
+            <a:ext cx="7040880" cy="768096"/>
           </a:xfrm>
           <a:prstGeom prst="rect">
             <a:avLst/>
@@ -20054,24 +18945,25 @@
             <a:r>
               <a:rPr sz="1100" b="0" i="0">
                 <a:solidFill>
-                  <a:srgbClr val="FFFFFF"/>
-                </a:solidFill>
-              </a:rPr>
-              <a:t>着工と認知獲得</a:t>
-            </a:r>
-          </a:p>
-        </p:txBody>
-      </p:sp>
-      <p:sp>
-        <p:nvSpPr>
-          <p:cNvPr id="27" name="Rectangle 26"/>
+                  <a:srgbClr val="F0E6D3"/>
+                </a:solidFill>
+              </a:rPr>
+              <a:t>時給を相場より50〜100円高く設定し採用競争力を確保。
+仕組み化により属人依存を排除。常時採用を継続。</a:t>
+            </a:r>
+          </a:p>
+        </p:txBody>
+      </p:sp>
+      <p:sp>
+        <p:nvSpPr>
+          <p:cNvPr id="22" name="Rectangle 21"/>
           <p:cNvSpPr/>
           <p:nvPr/>
         </p:nvSpPr>
         <p:spPr>
           <a:xfrm>
-            <a:off x="8229600" y="1984248"/>
-            <a:ext cx="3657600" cy="4206240"/>
+            <a:off x="457200" y="3465576"/>
+            <a:ext cx="11247120" cy="859536"/>
           </a:xfrm>
           <a:prstGeom prst="rect">
             <a:avLst/>
@@ -20107,190 +18999,20 @@
       </p:sp>
       <p:sp>
         <p:nvSpPr>
-          <p:cNvPr id="28" name="TextBox 27"/>
-          <p:cNvSpPr txBox="1"/>
-          <p:nvPr/>
-        </p:nvSpPr>
-        <p:spPr>
-          <a:xfrm>
-            <a:off x="8366760" y="2084831"/>
-            <a:ext cx="3383280" cy="694944"/>
-          </a:xfrm>
-          <a:prstGeom prst="rect">
-            <a:avLst/>
-          </a:prstGeom>
-          <a:noFill/>
-        </p:spPr>
-        <p:txBody>
-          <a:bodyPr wrap="square">
-            <a:spAutoFit/>
-          </a:bodyPr>
-          <a:lstStyle/>
-          <a:p>
-            <a:pPr algn="l"/>
-            <a:r>
-              <a:rPr sz="1200" b="0" i="0">
-                <a:solidFill>
-                  <a:srgbClr val="F0E6D3"/>
-                </a:solidFill>
-              </a:rPr>
-              <a:t>□ 内装・厨房工事着工</a:t>
-            </a:r>
-          </a:p>
-        </p:txBody>
-      </p:sp>
-      <p:sp>
-        <p:nvSpPr>
-          <p:cNvPr id="29" name="TextBox 28"/>
-          <p:cNvSpPr txBox="1"/>
-          <p:nvPr/>
-        </p:nvSpPr>
-        <p:spPr>
-          <a:xfrm>
-            <a:off x="8366760" y="2852927"/>
-            <a:ext cx="3383280" cy="694944"/>
-          </a:xfrm>
-          <a:prstGeom prst="rect">
-            <a:avLst/>
-          </a:prstGeom>
-          <a:noFill/>
-        </p:spPr>
-        <p:txBody>
-          <a:bodyPr wrap="square">
-            <a:spAutoFit/>
-          </a:bodyPr>
-          <a:lstStyle/>
-          <a:p>
-            <a:pPr algn="l"/>
-            <a:r>
-              <a:rPr sz="1200" b="0" i="0">
-                <a:solidFill>
-                  <a:srgbClr val="F0E6D3"/>
-                </a:solidFill>
-              </a:rPr>
-              <a:t>□ スタッフ採用開始</a:t>
-            </a:r>
-          </a:p>
-        </p:txBody>
-      </p:sp>
-      <p:sp>
-        <p:nvSpPr>
-          <p:cNvPr id="30" name="TextBox 29"/>
-          <p:cNvSpPr txBox="1"/>
-          <p:nvPr/>
-        </p:nvSpPr>
-        <p:spPr>
-          <a:xfrm>
-            <a:off x="8366760" y="3621024"/>
-            <a:ext cx="3383280" cy="694944"/>
-          </a:xfrm>
-          <a:prstGeom prst="rect">
-            <a:avLst/>
-          </a:prstGeom>
-          <a:noFill/>
-        </p:spPr>
-        <p:txBody>
-          <a:bodyPr wrap="square">
-            <a:spAutoFit/>
-          </a:bodyPr>
-          <a:lstStyle/>
-          <a:p>
-            <a:pPr algn="l"/>
-            <a:r>
-              <a:rPr sz="1200" b="0" i="0">
-                <a:solidFill>
-                  <a:srgbClr val="F0E6D3"/>
-                </a:solidFill>
-              </a:rPr>
-              <a:t>□ インフルエンサー招待DM開始</a:t>
-            </a:r>
-          </a:p>
-        </p:txBody>
-      </p:sp>
-      <p:sp>
-        <p:nvSpPr>
-          <p:cNvPr id="31" name="TextBox 30"/>
-          <p:cNvSpPr txBox="1"/>
-          <p:nvPr/>
-        </p:nvSpPr>
-        <p:spPr>
-          <a:xfrm>
-            <a:off x="8366760" y="4389120"/>
-            <a:ext cx="3383280" cy="694944"/>
-          </a:xfrm>
-          <a:prstGeom prst="rect">
-            <a:avLst/>
-          </a:prstGeom>
-          <a:noFill/>
-        </p:spPr>
-        <p:txBody>
-          <a:bodyPr wrap="square">
-            <a:spAutoFit/>
-          </a:bodyPr>
-          <a:lstStyle/>
-          <a:p>
-            <a:pPr algn="l"/>
-            <a:r>
-              <a:rPr sz="1200" b="0" i="0">
-                <a:solidFill>
-                  <a:srgbClr val="F0E6D3"/>
-                </a:solidFill>
-              </a:rPr>
-              <a:t>□ Googleビジネスプロフィール登録</a:t>
-            </a:r>
-          </a:p>
-        </p:txBody>
-      </p:sp>
-      <p:sp>
-        <p:nvSpPr>
-          <p:cNvPr id="32" name="TextBox 31"/>
-          <p:cNvSpPr txBox="1"/>
-          <p:nvPr/>
-        </p:nvSpPr>
-        <p:spPr>
-          <a:xfrm>
-            <a:off x="8366760" y="5157216"/>
-            <a:ext cx="3383280" cy="694944"/>
-          </a:xfrm>
-          <a:prstGeom prst="rect">
-            <a:avLst/>
-          </a:prstGeom>
-          <a:noFill/>
-        </p:spPr>
-        <p:txBody>
-          <a:bodyPr wrap="square">
-            <a:spAutoFit/>
-          </a:bodyPr>
-          <a:lstStyle/>
-          <a:p>
-            <a:pPr algn="l"/>
-            <a:r>
-              <a:rPr sz="1200" b="0" i="0">
-                <a:solidFill>
-                  <a:srgbClr val="F0E6D3"/>
-                </a:solidFill>
-              </a:rPr>
-              <a:t>□ POSシステム・決済端末導入</a:t>
-            </a:r>
-          </a:p>
-        </p:txBody>
-      </p:sp>
-      <p:sp>
-        <p:nvSpPr>
-          <p:cNvPr id="33" name="Rectangle 32"/>
+          <p:cNvPr id="23" name="Rectangle 22"/>
           <p:cNvSpPr/>
           <p:nvPr/>
         </p:nvSpPr>
         <p:spPr>
           <a:xfrm>
-            <a:off x="457200" y="6400800"/>
-            <a:ext cx="11247120" cy="347472"/>
+            <a:off x="457200" y="3465576"/>
+            <a:ext cx="457200" cy="859536"/>
           </a:xfrm>
           <a:prstGeom prst="rect">
             <a:avLst/>
           </a:prstGeom>
           <a:solidFill>
-            <a:srgbClr val="3A2A08"/>
+            <a:srgbClr val="C8963C"/>
           </a:solidFill>
           <a:ln>
             <a:noFill/>
@@ -20320,41 +19042,821 @@
       </p:sp>
       <p:sp>
         <p:nvSpPr>
+          <p:cNvPr id="24" name="TextBox 23"/>
+          <p:cNvSpPr txBox="1"/>
+          <p:nvPr/>
+        </p:nvSpPr>
+        <p:spPr>
+          <a:xfrm>
+            <a:off x="457200" y="3721608"/>
+            <a:ext cx="457200" cy="329184"/>
+          </a:xfrm>
+          <a:prstGeom prst="rect">
+            <a:avLst/>
+          </a:prstGeom>
+          <a:noFill/>
+        </p:spPr>
+        <p:txBody>
+          <a:bodyPr wrap="square">
+            <a:spAutoFit/>
+          </a:bodyPr>
+          <a:lstStyle/>
+          <a:p>
+            <a:pPr algn="ctr"/>
+            <a:r>
+              <a:rPr sz="1100" b="1" i="0">
+                <a:solidFill>
+                  <a:srgbClr val="1A120B"/>
+                </a:solidFill>
+              </a:rPr>
+              <a:t>中</a:t>
+            </a:r>
+          </a:p>
+        </p:txBody>
+      </p:sp>
+      <p:sp>
+        <p:nvSpPr>
+          <p:cNvPr id="25" name="TextBox 24"/>
+          <p:cNvSpPr txBox="1"/>
+          <p:nvPr/>
+        </p:nvSpPr>
+        <p:spPr>
+          <a:xfrm>
+            <a:off x="1005840" y="3511296"/>
+            <a:ext cx="2743200" cy="347472"/>
+          </a:xfrm>
+          <a:prstGeom prst="rect">
+            <a:avLst/>
+          </a:prstGeom>
+          <a:noFill/>
+        </p:spPr>
+        <p:txBody>
+          <a:bodyPr wrap="square">
+            <a:spAutoFit/>
+          </a:bodyPr>
+          <a:lstStyle/>
+          <a:p>
+            <a:pPr algn="l"/>
+            <a:r>
+              <a:rPr sz="1300" b="1" i="0">
+                <a:solidFill>
+                  <a:srgbClr val="FFFFFF"/>
+                </a:solidFill>
+              </a:rPr>
+              <a:t>③ 原材料費の高騰</a:t>
+            </a:r>
+          </a:p>
+        </p:txBody>
+      </p:sp>
+      <p:sp>
+        <p:nvSpPr>
+          <p:cNvPr id="26" name="TextBox 25"/>
+          <p:cNvSpPr txBox="1"/>
+          <p:nvPr/>
+        </p:nvSpPr>
+        <p:spPr>
+          <a:xfrm>
+            <a:off x="1005840" y="3904488"/>
+            <a:ext cx="2743200" cy="347472"/>
+          </a:xfrm>
+          <a:prstGeom prst="rect">
+            <a:avLst/>
+          </a:prstGeom>
+          <a:noFill/>
+        </p:spPr>
+        <p:txBody>
+          <a:bodyPr wrap="square">
+            <a:spAutoFit/>
+          </a:bodyPr>
+          <a:lstStyle/>
+          <a:p>
+            <a:pPr algn="l"/>
+            <a:r>
+              <a:rPr sz="1100" b="0" i="1">
+                <a:solidFill>
+                  <a:srgbClr val="8A7A6A"/>
+                </a:solidFill>
+              </a:rPr>
+              <a:t>牛サガリの価格変動・円安影響</a:t>
+            </a:r>
+          </a:p>
+        </p:txBody>
+      </p:sp>
+      <p:sp>
+        <p:nvSpPr>
+          <p:cNvPr id="27" name="Rectangle 26"/>
+          <p:cNvSpPr/>
+          <p:nvPr/>
+        </p:nvSpPr>
+        <p:spPr>
+          <a:xfrm>
+            <a:off x="3931920" y="3538728"/>
+            <a:ext cx="457200" cy="256032"/>
+          </a:xfrm>
+          <a:prstGeom prst="rect">
+            <a:avLst/>
+          </a:prstGeom>
+          <a:solidFill>
+            <a:srgbClr val="C8963C"/>
+          </a:solidFill>
+          <a:ln>
+            <a:noFill/>
+          </a:ln>
+        </p:spPr>
+        <p:style>
+          <a:lnRef idx="1">
+            <a:schemeClr val="accent1"/>
+          </a:lnRef>
+          <a:fillRef idx="3">
+            <a:schemeClr val="accent1"/>
+          </a:fillRef>
+          <a:effectRef idx="2">
+            <a:schemeClr val="accent1"/>
+          </a:effectRef>
+          <a:fontRef idx="minor">
+            <a:schemeClr val="lt1"/>
+          </a:fontRef>
+        </p:style>
+        <p:txBody>
+          <a:bodyPr rtlCol="0" anchor="ctr"/>
+          <a:lstStyle/>
+          <a:p>
+            <a:pPr algn="ctr"/>
+          </a:p>
+        </p:txBody>
+      </p:sp>
+      <p:sp>
+        <p:nvSpPr>
+          <p:cNvPr id="28" name="TextBox 27"/>
+          <p:cNvSpPr txBox="1"/>
+          <p:nvPr/>
+        </p:nvSpPr>
+        <p:spPr>
+          <a:xfrm>
+            <a:off x="3931920" y="3538728"/>
+            <a:ext cx="457200" cy="256032"/>
+          </a:xfrm>
+          <a:prstGeom prst="rect">
+            <a:avLst/>
+          </a:prstGeom>
+          <a:noFill/>
+        </p:spPr>
+        <p:txBody>
+          <a:bodyPr wrap="square">
+            <a:spAutoFit/>
+          </a:bodyPr>
+          <a:lstStyle/>
+          <a:p>
+            <a:pPr algn="ctr"/>
+            <a:r>
+              <a:rPr sz="900" b="1" i="0">
+                <a:solidFill>
+                  <a:srgbClr val="1A120B"/>
+                </a:solidFill>
+              </a:rPr>
+              <a:t>対策</a:t>
+            </a:r>
+          </a:p>
+        </p:txBody>
+      </p:sp>
+      <p:sp>
+        <p:nvSpPr>
+          <p:cNvPr id="29" name="TextBox 28"/>
+          <p:cNvSpPr txBox="1"/>
+          <p:nvPr/>
+        </p:nvSpPr>
+        <p:spPr>
+          <a:xfrm>
+            <a:off x="4480560" y="3511296"/>
+            <a:ext cx="7040880" cy="768096"/>
+          </a:xfrm>
+          <a:prstGeom prst="rect">
+            <a:avLst/>
+          </a:prstGeom>
+          <a:noFill/>
+        </p:spPr>
+        <p:txBody>
+          <a:bodyPr wrap="square">
+            <a:spAutoFit/>
+          </a:bodyPr>
+          <a:lstStyle/>
+          <a:p>
+            <a:pPr algn="l"/>
+            <a:r>
+              <a:rPr sz="1100" b="0" i="0">
+                <a:solidFill>
+                  <a:srgbClr val="F0E6D3"/>
+                </a:solidFill>
+              </a:rPr>
+              <a:t>複数仕入れ先を確保し価格交渉力を維持。
+鶏・豚メニューの比率調整で原価率をコントロール。</a:t>
+            </a:r>
+          </a:p>
+        </p:txBody>
+      </p:sp>
+      <p:sp>
+        <p:nvSpPr>
+          <p:cNvPr id="30" name="Rectangle 29"/>
+          <p:cNvSpPr/>
+          <p:nvPr/>
+        </p:nvSpPr>
+        <p:spPr>
+          <a:xfrm>
+            <a:off x="457200" y="4398264"/>
+            <a:ext cx="11247120" cy="859536"/>
+          </a:xfrm>
+          <a:prstGeom prst="rect">
+            <a:avLst/>
+          </a:prstGeom>
+          <a:solidFill>
+            <a:srgbClr val="2A1E12"/>
+          </a:solidFill>
+          <a:ln>
+            <a:noFill/>
+          </a:ln>
+        </p:spPr>
+        <p:style>
+          <a:lnRef idx="1">
+            <a:schemeClr val="accent1"/>
+          </a:lnRef>
+          <a:fillRef idx="3">
+            <a:schemeClr val="accent1"/>
+          </a:fillRef>
+          <a:effectRef idx="2">
+            <a:schemeClr val="accent1"/>
+          </a:effectRef>
+          <a:fontRef idx="minor">
+            <a:schemeClr val="lt1"/>
+          </a:fontRef>
+        </p:style>
+        <p:txBody>
+          <a:bodyPr rtlCol="0" anchor="ctr"/>
+          <a:lstStyle/>
+          <a:p>
+            <a:pPr algn="ctr"/>
+          </a:p>
+        </p:txBody>
+      </p:sp>
+      <p:sp>
+        <p:nvSpPr>
+          <p:cNvPr id="31" name="Rectangle 30"/>
+          <p:cNvSpPr/>
+          <p:nvPr/>
+        </p:nvSpPr>
+        <p:spPr>
+          <a:xfrm>
+            <a:off x="457200" y="4398264"/>
+            <a:ext cx="457200" cy="859536"/>
+          </a:xfrm>
+          <a:prstGeom prst="rect">
+            <a:avLst/>
+          </a:prstGeom>
+          <a:solidFill>
+            <a:srgbClr val="277A5A"/>
+          </a:solidFill>
+          <a:ln>
+            <a:noFill/>
+          </a:ln>
+        </p:spPr>
+        <p:style>
+          <a:lnRef idx="1">
+            <a:schemeClr val="accent1"/>
+          </a:lnRef>
+          <a:fillRef idx="3">
+            <a:schemeClr val="accent1"/>
+          </a:fillRef>
+          <a:effectRef idx="2">
+            <a:schemeClr val="accent1"/>
+          </a:effectRef>
+          <a:fontRef idx="minor">
+            <a:schemeClr val="lt1"/>
+          </a:fontRef>
+        </p:style>
+        <p:txBody>
+          <a:bodyPr rtlCol="0" anchor="ctr"/>
+          <a:lstStyle/>
+          <a:p>
+            <a:pPr algn="ctr"/>
+          </a:p>
+        </p:txBody>
+      </p:sp>
+      <p:sp>
+        <p:nvSpPr>
+          <p:cNvPr id="32" name="TextBox 31"/>
+          <p:cNvSpPr txBox="1"/>
+          <p:nvPr/>
+        </p:nvSpPr>
+        <p:spPr>
+          <a:xfrm>
+            <a:off x="457200" y="4654296"/>
+            <a:ext cx="457200" cy="329184"/>
+          </a:xfrm>
+          <a:prstGeom prst="rect">
+            <a:avLst/>
+          </a:prstGeom>
+          <a:noFill/>
+        </p:spPr>
+        <p:txBody>
+          <a:bodyPr wrap="square">
+            <a:spAutoFit/>
+          </a:bodyPr>
+          <a:lstStyle/>
+          <a:p>
+            <a:pPr algn="ctr"/>
+            <a:r>
+              <a:rPr sz="1100" b="1" i="0">
+                <a:solidFill>
+                  <a:srgbClr val="1A120B"/>
+                </a:solidFill>
+              </a:rPr>
+              <a:t>低</a:t>
+            </a:r>
+          </a:p>
+        </p:txBody>
+      </p:sp>
+      <p:sp>
+        <p:nvSpPr>
+          <p:cNvPr id="33" name="TextBox 32"/>
+          <p:cNvSpPr txBox="1"/>
+          <p:nvPr/>
+        </p:nvSpPr>
+        <p:spPr>
+          <a:xfrm>
+            <a:off x="1005840" y="4443984"/>
+            <a:ext cx="2743200" cy="347472"/>
+          </a:xfrm>
+          <a:prstGeom prst="rect">
+            <a:avLst/>
+          </a:prstGeom>
+          <a:noFill/>
+        </p:spPr>
+        <p:txBody>
+          <a:bodyPr wrap="square">
+            <a:spAutoFit/>
+          </a:bodyPr>
+          <a:lstStyle/>
+          <a:p>
+            <a:pPr algn="l"/>
+            <a:r>
+              <a:rPr sz="1300" b="1" i="0">
+                <a:solidFill>
+                  <a:srgbClr val="FFFFFF"/>
+                </a:solidFill>
+              </a:rPr>
+              <a:t>④ 競合の模倣・追随</a:t>
+            </a:r>
+          </a:p>
+        </p:txBody>
+      </p:sp>
+      <p:sp>
+        <p:nvSpPr>
           <p:cNvPr id="34" name="TextBox 33"/>
           <p:cNvSpPr txBox="1"/>
           <p:nvPr/>
         </p:nvSpPr>
         <p:spPr>
           <a:xfrm>
-            <a:off x="457200" y="6428232"/>
-            <a:ext cx="11247120" cy="292608"/>
-          </a:xfrm>
-          <a:prstGeom prst="rect">
-            <a:avLst/>
-          </a:prstGeom>
-          <a:noFill/>
-        </p:spPr>
-        <p:txBody>
-          <a:bodyPr wrap="square">
-            <a:spAutoFit/>
-          </a:bodyPr>
+            <a:off x="1005840" y="4837176"/>
+            <a:ext cx="2743200" cy="347472"/>
+          </a:xfrm>
+          <a:prstGeom prst="rect">
+            <a:avLst/>
+          </a:prstGeom>
+          <a:noFill/>
+        </p:spPr>
+        <p:txBody>
+          <a:bodyPr wrap="square">
+            <a:spAutoFit/>
+          </a:bodyPr>
+          <a:lstStyle/>
+          <a:p>
+            <a:pPr algn="l"/>
+            <a:r>
+              <a:rPr sz="1100" b="0" i="1">
+                <a:solidFill>
+                  <a:srgbClr val="8A7A6A"/>
+                </a:solidFill>
+              </a:rPr>
+              <a:t>糀漬け肉定食業態の競合参入</a:t>
+            </a:r>
+          </a:p>
+        </p:txBody>
+      </p:sp>
+      <p:sp>
+        <p:nvSpPr>
+          <p:cNvPr id="35" name="Rectangle 34"/>
+          <p:cNvSpPr/>
+          <p:nvPr/>
+        </p:nvSpPr>
+        <p:spPr>
+          <a:xfrm>
+            <a:off x="3931920" y="4471416"/>
+            <a:ext cx="457200" cy="256032"/>
+          </a:xfrm>
+          <a:prstGeom prst="rect">
+            <a:avLst/>
+          </a:prstGeom>
+          <a:solidFill>
+            <a:srgbClr val="C8963C"/>
+          </a:solidFill>
+          <a:ln>
+            <a:noFill/>
+          </a:ln>
+        </p:spPr>
+        <p:style>
+          <a:lnRef idx="1">
+            <a:schemeClr val="accent1"/>
+          </a:lnRef>
+          <a:fillRef idx="3">
+            <a:schemeClr val="accent1"/>
+          </a:fillRef>
+          <a:effectRef idx="2">
+            <a:schemeClr val="accent1"/>
+          </a:effectRef>
+          <a:fontRef idx="minor">
+            <a:schemeClr val="lt1"/>
+          </a:fontRef>
+        </p:style>
+        <p:txBody>
+          <a:bodyPr rtlCol="0" anchor="ctr"/>
           <a:lstStyle/>
           <a:p>
             <a:pPr algn="ctr"/>
+          </a:p>
+        </p:txBody>
+      </p:sp>
+      <p:sp>
+        <p:nvSpPr>
+          <p:cNvPr id="36" name="TextBox 35"/>
+          <p:cNvSpPr txBox="1"/>
+          <p:nvPr/>
+        </p:nvSpPr>
+        <p:spPr>
+          <a:xfrm>
+            <a:off x="3931920" y="4471416"/>
+            <a:ext cx="457200" cy="256032"/>
+          </a:xfrm>
+          <a:prstGeom prst="rect">
+            <a:avLst/>
+          </a:prstGeom>
+          <a:noFill/>
+        </p:spPr>
+        <p:txBody>
+          <a:bodyPr wrap="square">
+            <a:spAutoFit/>
+          </a:bodyPr>
+          <a:lstStyle/>
+          <a:p>
+            <a:pPr algn="ctr"/>
+            <a:r>
+              <a:rPr sz="900" b="1" i="0">
+                <a:solidFill>
+                  <a:srgbClr val="1A120B"/>
+                </a:solidFill>
+              </a:rPr>
+              <a:t>対策</a:t>
+            </a:r>
+          </a:p>
+        </p:txBody>
+      </p:sp>
+      <p:sp>
+        <p:nvSpPr>
+          <p:cNvPr id="37" name="TextBox 36"/>
+          <p:cNvSpPr txBox="1"/>
+          <p:nvPr/>
+        </p:nvSpPr>
+        <p:spPr>
+          <a:xfrm>
+            <a:off x="4480560" y="4443984"/>
+            <a:ext cx="7040880" cy="768096"/>
+          </a:xfrm>
+          <a:prstGeom prst="rect">
+            <a:avLst/>
+          </a:prstGeom>
+          <a:noFill/>
+        </p:spPr>
+        <p:txBody>
+          <a:bodyPr wrap="square">
+            <a:spAutoFit/>
+          </a:bodyPr>
+          <a:lstStyle/>
+          <a:p>
+            <a:pPr algn="l"/>
+            <a:r>
+              <a:rPr sz="1100" b="0" i="0">
+                <a:solidFill>
+                  <a:srgbClr val="F0E6D3"/>
+                </a:solidFill>
+              </a:rPr>
+              <a:t>ブランド「然」の商標登録で保護（第43類・飲食）。
+先行者優位と顧客ロイヤリティで差別化を維持。</a:t>
+            </a:r>
+          </a:p>
+        </p:txBody>
+      </p:sp>
+      <p:sp>
+        <p:nvSpPr>
+          <p:cNvPr id="38" name="Rectangle 37"/>
+          <p:cNvSpPr/>
+          <p:nvPr/>
+        </p:nvSpPr>
+        <p:spPr>
+          <a:xfrm>
+            <a:off x="457200" y="5330952"/>
+            <a:ext cx="11247120" cy="859536"/>
+          </a:xfrm>
+          <a:prstGeom prst="rect">
+            <a:avLst/>
+          </a:prstGeom>
+          <a:solidFill>
+            <a:srgbClr val="2A1E12"/>
+          </a:solidFill>
+          <a:ln>
+            <a:noFill/>
+          </a:ln>
+        </p:spPr>
+        <p:style>
+          <a:lnRef idx="1">
+            <a:schemeClr val="accent1"/>
+          </a:lnRef>
+          <a:fillRef idx="3">
+            <a:schemeClr val="accent1"/>
+          </a:fillRef>
+          <a:effectRef idx="2">
+            <a:schemeClr val="accent1"/>
+          </a:effectRef>
+          <a:fontRef idx="minor">
+            <a:schemeClr val="lt1"/>
+          </a:fontRef>
+        </p:style>
+        <p:txBody>
+          <a:bodyPr rtlCol="0" anchor="ctr"/>
+          <a:lstStyle/>
+          <a:p>
+            <a:pPr algn="ctr"/>
+          </a:p>
+        </p:txBody>
+      </p:sp>
+      <p:sp>
+        <p:nvSpPr>
+          <p:cNvPr id="39" name="Rectangle 38"/>
+          <p:cNvSpPr/>
+          <p:nvPr/>
+        </p:nvSpPr>
+        <p:spPr>
+          <a:xfrm>
+            <a:off x="457200" y="5330952"/>
+            <a:ext cx="457200" cy="859536"/>
+          </a:xfrm>
+          <a:prstGeom prst="rect">
+            <a:avLst/>
+          </a:prstGeom>
+          <a:solidFill>
+            <a:srgbClr val="C8963C"/>
+          </a:solidFill>
+          <a:ln>
+            <a:noFill/>
+          </a:ln>
+        </p:spPr>
+        <p:style>
+          <a:lnRef idx="1">
+            <a:schemeClr val="accent1"/>
+          </a:lnRef>
+          <a:fillRef idx="3">
+            <a:schemeClr val="accent1"/>
+          </a:fillRef>
+          <a:effectRef idx="2">
+            <a:schemeClr val="accent1"/>
+          </a:effectRef>
+          <a:fontRef idx="minor">
+            <a:schemeClr val="lt1"/>
+          </a:fontRef>
+        </p:style>
+        <p:txBody>
+          <a:bodyPr rtlCol="0" anchor="ctr"/>
+          <a:lstStyle/>
+          <a:p>
+            <a:pPr algn="ctr"/>
+          </a:p>
+        </p:txBody>
+      </p:sp>
+      <p:sp>
+        <p:nvSpPr>
+          <p:cNvPr id="40" name="TextBox 39"/>
+          <p:cNvSpPr txBox="1"/>
+          <p:nvPr/>
+        </p:nvSpPr>
+        <p:spPr>
+          <a:xfrm>
+            <a:off x="457200" y="5586984"/>
+            <a:ext cx="457200" cy="329184"/>
+          </a:xfrm>
+          <a:prstGeom prst="rect">
+            <a:avLst/>
+          </a:prstGeom>
+          <a:noFill/>
+        </p:spPr>
+        <p:txBody>
+          <a:bodyPr wrap="square">
+            <a:spAutoFit/>
+          </a:bodyPr>
+          <a:lstStyle/>
+          <a:p>
+            <a:pPr algn="ctr"/>
+            <a:r>
+              <a:rPr sz="1100" b="1" i="0">
+                <a:solidFill>
+                  <a:srgbClr val="1A120B"/>
+                </a:solidFill>
+              </a:rPr>
+              <a:t>中</a:t>
+            </a:r>
+          </a:p>
+        </p:txBody>
+      </p:sp>
+      <p:sp>
+        <p:nvSpPr>
+          <p:cNvPr id="41" name="TextBox 40"/>
+          <p:cNvSpPr txBox="1"/>
+          <p:nvPr/>
+        </p:nvSpPr>
+        <p:spPr>
+          <a:xfrm>
+            <a:off x="1005840" y="5376672"/>
+            <a:ext cx="2743200" cy="347472"/>
+          </a:xfrm>
+          <a:prstGeom prst="rect">
+            <a:avLst/>
+          </a:prstGeom>
+          <a:noFill/>
+        </p:spPr>
+        <p:txBody>
+          <a:bodyPr wrap="square">
+            <a:spAutoFit/>
+          </a:bodyPr>
+          <a:lstStyle/>
+          <a:p>
+            <a:pPr algn="l"/>
             <a:r>
               <a:rPr sz="1300" b="1" i="0">
                 <a:solidFill>
-                  <a:srgbClr val="C8963C"/>
-                </a:solidFill>
-              </a:rPr>
-              <a:t>90日後のゴール：物件契約完了・融資確定・SNS認知スタート　→　開業へ</a:t>
-            </a:r>
-          </a:p>
-        </p:txBody>
-      </p:sp>
-      <p:sp>
-        <p:nvSpPr>
-          <p:cNvPr id="35" name="TextBox 34"/>
+                  <a:srgbClr val="FFFFFF"/>
+                </a:solidFill>
+              </a:rPr>
+              <a:t>⑤ FC加盟者の品質管理</a:t>
+            </a:r>
+          </a:p>
+        </p:txBody>
+      </p:sp>
+      <p:sp>
+        <p:nvSpPr>
+          <p:cNvPr id="42" name="TextBox 41"/>
+          <p:cNvSpPr txBox="1"/>
+          <p:nvPr/>
+        </p:nvSpPr>
+        <p:spPr>
+          <a:xfrm>
+            <a:off x="1005840" y="5769864"/>
+            <a:ext cx="2743200" cy="347472"/>
+          </a:xfrm>
+          <a:prstGeom prst="rect">
+            <a:avLst/>
+          </a:prstGeom>
+          <a:noFill/>
+        </p:spPr>
+        <p:txBody>
+          <a:bodyPr wrap="square">
+            <a:spAutoFit/>
+          </a:bodyPr>
+          <a:lstStyle/>
+          <a:p>
+            <a:pPr algn="l"/>
+            <a:r>
+              <a:rPr sz="1100" b="0" i="1">
+                <a:solidFill>
+                  <a:srgbClr val="8A7A6A"/>
+                </a:solidFill>
+              </a:rPr>
+              <a:t>FC展開後のQSCばらつき</a:t>
+            </a:r>
+          </a:p>
+        </p:txBody>
+      </p:sp>
+      <p:sp>
+        <p:nvSpPr>
+          <p:cNvPr id="43" name="Rectangle 42"/>
+          <p:cNvSpPr/>
+          <p:nvPr/>
+        </p:nvSpPr>
+        <p:spPr>
+          <a:xfrm>
+            <a:off x="3931920" y="5404104"/>
+            <a:ext cx="457200" cy="256032"/>
+          </a:xfrm>
+          <a:prstGeom prst="rect">
+            <a:avLst/>
+          </a:prstGeom>
+          <a:solidFill>
+            <a:srgbClr val="C8963C"/>
+          </a:solidFill>
+          <a:ln>
+            <a:noFill/>
+          </a:ln>
+        </p:spPr>
+        <p:style>
+          <a:lnRef idx="1">
+            <a:schemeClr val="accent1"/>
+          </a:lnRef>
+          <a:fillRef idx="3">
+            <a:schemeClr val="accent1"/>
+          </a:fillRef>
+          <a:effectRef idx="2">
+            <a:schemeClr val="accent1"/>
+          </a:effectRef>
+          <a:fontRef idx="minor">
+            <a:schemeClr val="lt1"/>
+          </a:fontRef>
+        </p:style>
+        <p:txBody>
+          <a:bodyPr rtlCol="0" anchor="ctr"/>
+          <a:lstStyle/>
+          <a:p>
+            <a:pPr algn="ctr"/>
+          </a:p>
+        </p:txBody>
+      </p:sp>
+      <p:sp>
+        <p:nvSpPr>
+          <p:cNvPr id="44" name="TextBox 43"/>
+          <p:cNvSpPr txBox="1"/>
+          <p:nvPr/>
+        </p:nvSpPr>
+        <p:spPr>
+          <a:xfrm>
+            <a:off x="3931920" y="5404104"/>
+            <a:ext cx="457200" cy="256032"/>
+          </a:xfrm>
+          <a:prstGeom prst="rect">
+            <a:avLst/>
+          </a:prstGeom>
+          <a:noFill/>
+        </p:spPr>
+        <p:txBody>
+          <a:bodyPr wrap="square">
+            <a:spAutoFit/>
+          </a:bodyPr>
+          <a:lstStyle/>
+          <a:p>
+            <a:pPr algn="ctr"/>
+            <a:r>
+              <a:rPr sz="900" b="1" i="0">
+                <a:solidFill>
+                  <a:srgbClr val="1A120B"/>
+                </a:solidFill>
+              </a:rPr>
+              <a:t>対策</a:t>
+            </a:r>
+          </a:p>
+        </p:txBody>
+      </p:sp>
+      <p:sp>
+        <p:nvSpPr>
+          <p:cNvPr id="45" name="TextBox 44"/>
+          <p:cNvSpPr txBox="1"/>
+          <p:nvPr/>
+        </p:nvSpPr>
+        <p:spPr>
+          <a:xfrm>
+            <a:off x="4480560" y="5376672"/>
+            <a:ext cx="7040880" cy="768096"/>
+          </a:xfrm>
+          <a:prstGeom prst="rect">
+            <a:avLst/>
+          </a:prstGeom>
+          <a:noFill/>
+        </p:spPr>
+        <p:txBody>
+          <a:bodyPr wrap="square">
+            <a:spAutoFit/>
+          </a:bodyPr>
+          <a:lstStyle/>
+          <a:p>
+            <a:pPr algn="l"/>
+            <a:r>
+              <a:rPr sz="1100" b="0" i="0">
+                <a:solidFill>
+                  <a:srgbClr val="F0E6D3"/>
+                </a:solidFill>
+              </a:rPr>
+              <a:t>SV定期巡回（月1回以上）・抜き打ち覆面調査の実施。
+数値基準を下回る店舗には改善プログラムを発動。</a:t>
+            </a:r>
+          </a:p>
+        </p:txBody>
+      </p:sp>
+      <p:sp>
+        <p:nvSpPr>
+          <p:cNvPr id="46" name="TextBox 45"/>
           <p:cNvSpPr txBox="1"/>
           <p:nvPr/>
         </p:nvSpPr>
@@ -20381,7 +19883,7 @@
                   <a:srgbClr val="8A7A6A"/>
                 </a:solidFill>
               </a:rPr>
-              <a:t>20 / 20</a:t>
+              <a:t>19 / 21</a:t>
             </a:r>
           </a:p>
         </p:txBody>
@@ -20699,7 +20201,7 @@
                   <a:srgbClr val="8A7A6A"/>
                 </a:solidFill>
               </a:rPr>
-              <a:t>2 / 20</a:t>
+              <a:t>2 / 21</a:t>
             </a:r>
           </a:p>
         </p:txBody>
@@ -20781,28 +20283,28 @@
         </p:nvSpPr>
         <p:spPr>
           <a:xfrm>
-            <a:off x="6858000" y="182880"/>
-            <a:ext cx="5029200" cy="5943600"/>
-          </a:xfrm>
-          <a:prstGeom prst="rect">
-            <a:avLst/>
-          </a:prstGeom>
-          <a:noFill/>
-        </p:spPr>
-        <p:txBody>
-          <a:bodyPr wrap="square">
-            <a:spAutoFit/>
-          </a:bodyPr>
-          <a:lstStyle/>
-          <a:p>
-            <a:pPr algn="ctr"/>
-            <a:r>
-              <a:rPr sz="28000" b="1" i="0">
-                <a:solidFill>
-                  <a:srgbClr val="2A1E12"/>
-                </a:solidFill>
-              </a:rPr>
-              <a:t>然</a:t>
+            <a:off x="548640" y="365760"/>
+            <a:ext cx="5486400" cy="457200"/>
+          </a:xfrm>
+          <a:prstGeom prst="rect">
+            <a:avLst/>
+          </a:prstGeom>
+          <a:noFill/>
+        </p:spPr>
+        <p:txBody>
+          <a:bodyPr wrap="square">
+            <a:spAutoFit/>
+          </a:bodyPr>
+          <a:lstStyle/>
+          <a:p>
+            <a:pPr algn="l"/>
+            <a:r>
+              <a:rPr sz="1100" b="1" i="0">
+                <a:solidFill>
+                  <a:srgbClr val="C8963C"/>
+                </a:solidFill>
+              </a:rPr>
+              <a:t>ACTION PLAN</a:t>
             </a:r>
           </a:p>
         </p:txBody>
@@ -20815,28 +20317,28 @@
         </p:nvSpPr>
         <p:spPr>
           <a:xfrm>
-            <a:off x="731520" y="1097280"/>
-            <a:ext cx="5943600" cy="548640"/>
-          </a:xfrm>
-          <a:prstGeom prst="rect">
-            <a:avLst/>
-          </a:prstGeom>
-          <a:noFill/>
-        </p:spPr>
-        <p:txBody>
-          <a:bodyPr wrap="square">
-            <a:spAutoFit/>
-          </a:bodyPr>
-          <a:lstStyle/>
-          <a:p>
-            <a:pPr algn="l"/>
-            <a:r>
-              <a:rPr sz="1600" b="1" i="0">
-                <a:solidFill>
-                  <a:srgbClr val="C8963C"/>
-                </a:solidFill>
-              </a:rPr>
-              <a:t>私たちが目指す未来</a:t>
+            <a:off x="548640" y="685800"/>
+            <a:ext cx="10058400" cy="640080"/>
+          </a:xfrm>
+          <a:prstGeom prst="rect">
+            <a:avLst/>
+          </a:prstGeom>
+          <a:noFill/>
+        </p:spPr>
+        <p:txBody>
+          <a:bodyPr wrap="square">
+            <a:spAutoFit/>
+          </a:bodyPr>
+          <a:lstStyle/>
+          <a:p>
+            <a:pPr algn="l"/>
+            <a:r>
+              <a:rPr sz="2800" b="1" i="0">
+                <a:solidFill>
+                  <a:srgbClr val="FFFFFF"/>
+                </a:solidFill>
+              </a:rPr>
+              <a:t>今後90日のアクションプラン</a:t>
             </a:r>
           </a:p>
         </p:txBody>
@@ -20849,8 +20351,8 @@
         </p:nvSpPr>
         <p:spPr>
           <a:xfrm>
-            <a:off x="731520" y="1691640"/>
-            <a:ext cx="5029200" cy="19050"/>
+            <a:off x="548640" y="1417320"/>
+            <a:ext cx="10515600" cy="19050"/>
           </a:xfrm>
           <a:prstGeom prst="rect">
             <a:avLst/>
@@ -20886,6 +20388,1269 @@
       </p:sp>
       <p:sp>
         <p:nvSpPr>
+          <p:cNvPr id="6" name="Rectangle 5"/>
+          <p:cNvSpPr/>
+          <p:nvPr/>
+        </p:nvSpPr>
+        <p:spPr>
+          <a:xfrm>
+            <a:off x="457200" y="1600200"/>
+            <a:ext cx="3657600" cy="384048"/>
+          </a:xfrm>
+          <a:prstGeom prst="rect">
+            <a:avLst/>
+          </a:prstGeom>
+          <a:solidFill>
+            <a:srgbClr val="3A2A08"/>
+          </a:solidFill>
+          <a:ln>
+            <a:noFill/>
+          </a:ln>
+        </p:spPr>
+        <p:style>
+          <a:lnRef idx="1">
+            <a:schemeClr val="accent1"/>
+          </a:lnRef>
+          <a:fillRef idx="3">
+            <a:schemeClr val="accent1"/>
+          </a:fillRef>
+          <a:effectRef idx="2">
+            <a:schemeClr val="accent1"/>
+          </a:effectRef>
+          <a:fontRef idx="minor">
+            <a:schemeClr val="lt1"/>
+          </a:fontRef>
+        </p:style>
+        <p:txBody>
+          <a:bodyPr rtlCol="0" anchor="ctr"/>
+          <a:lstStyle/>
+          <a:p>
+            <a:pPr algn="ctr"/>
+          </a:p>
+        </p:txBody>
+      </p:sp>
+      <p:sp>
+        <p:nvSpPr>
+          <p:cNvPr id="7" name="TextBox 6"/>
+          <p:cNvSpPr txBox="1"/>
+          <p:nvPr/>
+        </p:nvSpPr>
+        <p:spPr>
+          <a:xfrm>
+            <a:off x="548640" y="1627632"/>
+            <a:ext cx="1371600" cy="329184"/>
+          </a:xfrm>
+          <a:prstGeom prst="rect">
+            <a:avLst/>
+          </a:prstGeom>
+          <a:noFill/>
+        </p:spPr>
+        <p:txBody>
+          <a:bodyPr wrap="square">
+            <a:spAutoFit/>
+          </a:bodyPr>
+          <a:lstStyle/>
+          <a:p>
+            <a:pPr algn="l"/>
+            <a:r>
+              <a:rPr sz="1200" b="1" i="0">
+                <a:solidFill>
+                  <a:srgbClr val="C8963C"/>
+                </a:solidFill>
+              </a:rPr>
+              <a:t>0〜30日</a:t>
+            </a:r>
+          </a:p>
+        </p:txBody>
+      </p:sp>
+      <p:sp>
+        <p:nvSpPr>
+          <p:cNvPr id="8" name="TextBox 7"/>
+          <p:cNvSpPr txBox="1"/>
+          <p:nvPr/>
+        </p:nvSpPr>
+        <p:spPr>
+          <a:xfrm>
+            <a:off x="1920240" y="1627632"/>
+            <a:ext cx="2011680" cy="329184"/>
+          </a:xfrm>
+          <a:prstGeom prst="rect">
+            <a:avLst/>
+          </a:prstGeom>
+          <a:noFill/>
+        </p:spPr>
+        <p:txBody>
+          <a:bodyPr wrap="square">
+            <a:spAutoFit/>
+          </a:bodyPr>
+          <a:lstStyle/>
+          <a:p>
+            <a:pPr algn="l"/>
+            <a:r>
+              <a:rPr sz="1100" b="0" i="0">
+                <a:solidFill>
+                  <a:srgbClr val="FFFFFF"/>
+                </a:solidFill>
+              </a:rPr>
+              <a:t>仕込みと準備</a:t>
+            </a:r>
+          </a:p>
+        </p:txBody>
+      </p:sp>
+      <p:sp>
+        <p:nvSpPr>
+          <p:cNvPr id="9" name="Rectangle 8"/>
+          <p:cNvSpPr/>
+          <p:nvPr/>
+        </p:nvSpPr>
+        <p:spPr>
+          <a:xfrm>
+            <a:off x="457200" y="1984248"/>
+            <a:ext cx="3657600" cy="4206240"/>
+          </a:xfrm>
+          <a:prstGeom prst="rect">
+            <a:avLst/>
+          </a:prstGeom>
+          <a:solidFill>
+            <a:srgbClr val="2A1E12"/>
+          </a:solidFill>
+          <a:ln>
+            <a:noFill/>
+          </a:ln>
+        </p:spPr>
+        <p:style>
+          <a:lnRef idx="1">
+            <a:schemeClr val="accent1"/>
+          </a:lnRef>
+          <a:fillRef idx="3">
+            <a:schemeClr val="accent1"/>
+          </a:fillRef>
+          <a:effectRef idx="2">
+            <a:schemeClr val="accent1"/>
+          </a:effectRef>
+          <a:fontRef idx="minor">
+            <a:schemeClr val="lt1"/>
+          </a:fontRef>
+        </p:style>
+        <p:txBody>
+          <a:bodyPr rtlCol="0" anchor="ctr"/>
+          <a:lstStyle/>
+          <a:p>
+            <a:pPr algn="ctr"/>
+          </a:p>
+        </p:txBody>
+      </p:sp>
+      <p:sp>
+        <p:nvSpPr>
+          <p:cNvPr id="10" name="TextBox 9"/>
+          <p:cNvSpPr txBox="1"/>
+          <p:nvPr/>
+        </p:nvSpPr>
+        <p:spPr>
+          <a:xfrm>
+            <a:off x="594360" y="2084831"/>
+            <a:ext cx="3383280" cy="694944"/>
+          </a:xfrm>
+          <a:prstGeom prst="rect">
+            <a:avLst/>
+          </a:prstGeom>
+          <a:noFill/>
+        </p:spPr>
+        <p:txBody>
+          <a:bodyPr wrap="square">
+            <a:spAutoFit/>
+          </a:bodyPr>
+          <a:lstStyle/>
+          <a:p>
+            <a:pPr algn="l"/>
+            <a:r>
+              <a:rPr sz="1200" b="0" i="0">
+                <a:solidFill>
+                  <a:srgbClr val="F0E6D3"/>
+                </a:solidFill>
+              </a:rPr>
+              <a:t>□ 会社設立（登記・口座開設）</a:t>
+            </a:r>
+          </a:p>
+        </p:txBody>
+      </p:sp>
+      <p:sp>
+        <p:nvSpPr>
+          <p:cNvPr id="11" name="TextBox 10"/>
+          <p:cNvSpPr txBox="1"/>
+          <p:nvPr/>
+        </p:nvSpPr>
+        <p:spPr>
+          <a:xfrm>
+            <a:off x="594360" y="2852927"/>
+            <a:ext cx="3383280" cy="694944"/>
+          </a:xfrm>
+          <a:prstGeom prst="rect">
+            <a:avLst/>
+          </a:prstGeom>
+          <a:noFill/>
+        </p:spPr>
+        <p:txBody>
+          <a:bodyPr wrap="square">
+            <a:spAutoFit/>
+          </a:bodyPr>
+          <a:lstStyle/>
+          <a:p>
+            <a:pPr algn="l"/>
+            <a:r>
+              <a:rPr sz="1200" b="0" i="0">
+                <a:solidFill>
+                  <a:srgbClr val="F0E6D3"/>
+                </a:solidFill>
+              </a:rPr>
+              <a:t>□ 「肉酒場 然」商標調査・出願</a:t>
+            </a:r>
+          </a:p>
+        </p:txBody>
+      </p:sp>
+      <p:sp>
+        <p:nvSpPr>
+          <p:cNvPr id="12" name="TextBox 11"/>
+          <p:cNvSpPr txBox="1"/>
+          <p:nvPr/>
+        </p:nvSpPr>
+        <p:spPr>
+          <a:xfrm>
+            <a:off x="594360" y="3621024"/>
+            <a:ext cx="3383280" cy="694944"/>
+          </a:xfrm>
+          <a:prstGeom prst="rect">
+            <a:avLst/>
+          </a:prstGeom>
+          <a:noFill/>
+        </p:spPr>
+        <p:txBody>
+          <a:bodyPr wrap="square">
+            <a:spAutoFit/>
+          </a:bodyPr>
+          <a:lstStyle/>
+          <a:p>
+            <a:pPr algn="l"/>
+            <a:r>
+              <a:rPr sz="1200" b="0" i="0">
+                <a:solidFill>
+                  <a:srgbClr val="F0E6D3"/>
+                </a:solidFill>
+              </a:rPr>
+              <a:t>□ 物件情報収集（三軒茶屋・目黒・自由が丘）</a:t>
+            </a:r>
+          </a:p>
+        </p:txBody>
+      </p:sp>
+      <p:sp>
+        <p:nvSpPr>
+          <p:cNvPr id="13" name="TextBox 12"/>
+          <p:cNvSpPr txBox="1"/>
+          <p:nvPr/>
+        </p:nvSpPr>
+        <p:spPr>
+          <a:xfrm>
+            <a:off x="594360" y="4389120"/>
+            <a:ext cx="3383280" cy="694944"/>
+          </a:xfrm>
+          <a:prstGeom prst="rect">
+            <a:avLst/>
+          </a:prstGeom>
+          <a:noFill/>
+        </p:spPr>
+        <p:txBody>
+          <a:bodyPr wrap="square">
+            <a:spAutoFit/>
+          </a:bodyPr>
+          <a:lstStyle/>
+          <a:p>
+            <a:pPr algn="l"/>
+            <a:r>
+              <a:rPr sz="1200" b="0" i="0">
+                <a:solidFill>
+                  <a:srgbClr val="F0E6D3"/>
+                </a:solidFill>
+              </a:rPr>
+              <a:t>□ 日本政策金融公庫への相談・申込</a:t>
+            </a:r>
+          </a:p>
+        </p:txBody>
+      </p:sp>
+      <p:sp>
+        <p:nvSpPr>
+          <p:cNvPr id="14" name="TextBox 13"/>
+          <p:cNvSpPr txBox="1"/>
+          <p:nvPr/>
+        </p:nvSpPr>
+        <p:spPr>
+          <a:xfrm>
+            <a:off x="594360" y="5157216"/>
+            <a:ext cx="3383280" cy="694944"/>
+          </a:xfrm>
+          <a:prstGeom prst="rect">
+            <a:avLst/>
+          </a:prstGeom>
+          <a:noFill/>
+        </p:spPr>
+        <p:txBody>
+          <a:bodyPr wrap="square">
+            <a:spAutoFit/>
+          </a:bodyPr>
+          <a:lstStyle/>
+          <a:p>
+            <a:pPr algn="l"/>
+            <a:r>
+              <a:rPr sz="1200" b="0" i="0">
+                <a:solidFill>
+                  <a:srgbClr val="F0E6D3"/>
+                </a:solidFill>
+              </a:rPr>
+              <a:t>□ Instagramアカウント開設</a:t>
+            </a:r>
+          </a:p>
+        </p:txBody>
+      </p:sp>
+      <p:sp>
+        <p:nvSpPr>
+          <p:cNvPr id="15" name="Rectangle 14"/>
+          <p:cNvSpPr/>
+          <p:nvPr/>
+        </p:nvSpPr>
+        <p:spPr>
+          <a:xfrm>
+            <a:off x="4343400" y="1600200"/>
+            <a:ext cx="3657600" cy="384048"/>
+          </a:xfrm>
+          <a:prstGeom prst="rect">
+            <a:avLst/>
+          </a:prstGeom>
+          <a:solidFill>
+            <a:srgbClr val="3A2805"/>
+          </a:solidFill>
+          <a:ln>
+            <a:noFill/>
+          </a:ln>
+        </p:spPr>
+        <p:style>
+          <a:lnRef idx="1">
+            <a:schemeClr val="accent1"/>
+          </a:lnRef>
+          <a:fillRef idx="3">
+            <a:schemeClr val="accent1"/>
+          </a:fillRef>
+          <a:effectRef idx="2">
+            <a:schemeClr val="accent1"/>
+          </a:effectRef>
+          <a:fontRef idx="minor">
+            <a:schemeClr val="lt1"/>
+          </a:fontRef>
+        </p:style>
+        <p:txBody>
+          <a:bodyPr rtlCol="0" anchor="ctr"/>
+          <a:lstStyle/>
+          <a:p>
+            <a:pPr algn="ctr"/>
+          </a:p>
+        </p:txBody>
+      </p:sp>
+      <p:sp>
+        <p:nvSpPr>
+          <p:cNvPr id="16" name="TextBox 15"/>
+          <p:cNvSpPr txBox="1"/>
+          <p:nvPr/>
+        </p:nvSpPr>
+        <p:spPr>
+          <a:xfrm>
+            <a:off x="4434840" y="1627632"/>
+            <a:ext cx="1371600" cy="329184"/>
+          </a:xfrm>
+          <a:prstGeom prst="rect">
+            <a:avLst/>
+          </a:prstGeom>
+          <a:noFill/>
+        </p:spPr>
+        <p:txBody>
+          <a:bodyPr wrap="square">
+            <a:spAutoFit/>
+          </a:bodyPr>
+          <a:lstStyle/>
+          <a:p>
+            <a:pPr algn="l"/>
+            <a:r>
+              <a:rPr sz="1200" b="1" i="0">
+                <a:solidFill>
+                  <a:srgbClr val="C8963C"/>
+                </a:solidFill>
+              </a:rPr>
+              <a:t>30〜60日</a:t>
+            </a:r>
+          </a:p>
+        </p:txBody>
+      </p:sp>
+      <p:sp>
+        <p:nvSpPr>
+          <p:cNvPr id="17" name="TextBox 16"/>
+          <p:cNvSpPr txBox="1"/>
+          <p:nvPr/>
+        </p:nvSpPr>
+        <p:spPr>
+          <a:xfrm>
+            <a:off x="5806440" y="1627632"/>
+            <a:ext cx="2011680" cy="329184"/>
+          </a:xfrm>
+          <a:prstGeom prst="rect">
+            <a:avLst/>
+          </a:prstGeom>
+          <a:noFill/>
+        </p:spPr>
+        <p:txBody>
+          <a:bodyPr wrap="square">
+            <a:spAutoFit/>
+          </a:bodyPr>
+          <a:lstStyle/>
+          <a:p>
+            <a:pPr algn="l"/>
+            <a:r>
+              <a:rPr sz="1100" b="0" i="0">
+                <a:solidFill>
+                  <a:srgbClr val="FFFFFF"/>
+                </a:solidFill>
+              </a:rPr>
+              <a:t>物件決定と資金確定</a:t>
+            </a:r>
+          </a:p>
+        </p:txBody>
+      </p:sp>
+      <p:sp>
+        <p:nvSpPr>
+          <p:cNvPr id="18" name="Rectangle 17"/>
+          <p:cNvSpPr/>
+          <p:nvPr/>
+        </p:nvSpPr>
+        <p:spPr>
+          <a:xfrm>
+            <a:off x="4343400" y="1984248"/>
+            <a:ext cx="3657600" cy="4206240"/>
+          </a:xfrm>
+          <a:prstGeom prst="rect">
+            <a:avLst/>
+          </a:prstGeom>
+          <a:solidFill>
+            <a:srgbClr val="2A1E12"/>
+          </a:solidFill>
+          <a:ln>
+            <a:noFill/>
+          </a:ln>
+        </p:spPr>
+        <p:style>
+          <a:lnRef idx="1">
+            <a:schemeClr val="accent1"/>
+          </a:lnRef>
+          <a:fillRef idx="3">
+            <a:schemeClr val="accent1"/>
+          </a:fillRef>
+          <a:effectRef idx="2">
+            <a:schemeClr val="accent1"/>
+          </a:effectRef>
+          <a:fontRef idx="minor">
+            <a:schemeClr val="lt1"/>
+          </a:fontRef>
+        </p:style>
+        <p:txBody>
+          <a:bodyPr rtlCol="0" anchor="ctr"/>
+          <a:lstStyle/>
+          <a:p>
+            <a:pPr algn="ctr"/>
+          </a:p>
+        </p:txBody>
+      </p:sp>
+      <p:sp>
+        <p:nvSpPr>
+          <p:cNvPr id="19" name="TextBox 18"/>
+          <p:cNvSpPr txBox="1"/>
+          <p:nvPr/>
+        </p:nvSpPr>
+        <p:spPr>
+          <a:xfrm>
+            <a:off x="4480560" y="2084831"/>
+            <a:ext cx="3383280" cy="694944"/>
+          </a:xfrm>
+          <a:prstGeom prst="rect">
+            <a:avLst/>
+          </a:prstGeom>
+          <a:noFill/>
+        </p:spPr>
+        <p:txBody>
+          <a:bodyPr wrap="square">
+            <a:spAutoFit/>
+          </a:bodyPr>
+          <a:lstStyle/>
+          <a:p>
+            <a:pPr algn="l"/>
+            <a:r>
+              <a:rPr sz="1200" b="0" i="0">
+                <a:solidFill>
+                  <a:srgbClr val="F0E6D3"/>
+                </a:solidFill>
+              </a:rPr>
+              <a:t>□ 物件内見・スコアリング評価</a:t>
+            </a:r>
+          </a:p>
+        </p:txBody>
+      </p:sp>
+      <p:sp>
+        <p:nvSpPr>
+          <p:cNvPr id="20" name="TextBox 19"/>
+          <p:cNvSpPr txBox="1"/>
+          <p:nvPr/>
+        </p:nvSpPr>
+        <p:spPr>
+          <a:xfrm>
+            <a:off x="4480560" y="2852927"/>
+            <a:ext cx="3383280" cy="694944"/>
+          </a:xfrm>
+          <a:prstGeom prst="rect">
+            <a:avLst/>
+          </a:prstGeom>
+          <a:noFill/>
+        </p:spPr>
+        <p:txBody>
+          <a:bodyPr wrap="square">
+            <a:spAutoFit/>
+          </a:bodyPr>
+          <a:lstStyle/>
+          <a:p>
+            <a:pPr algn="l"/>
+            <a:r>
+              <a:rPr sz="1200" b="0" i="0">
+                <a:solidFill>
+                  <a:srgbClr val="F0E6D3"/>
+                </a:solidFill>
+              </a:rPr>
+              <a:t>□ 公庫面談・融資確定</a:t>
+            </a:r>
+          </a:p>
+        </p:txBody>
+      </p:sp>
+      <p:sp>
+        <p:nvSpPr>
+          <p:cNvPr id="21" name="TextBox 20"/>
+          <p:cNvSpPr txBox="1"/>
+          <p:nvPr/>
+        </p:nvSpPr>
+        <p:spPr>
+          <a:xfrm>
+            <a:off x="4480560" y="3621024"/>
+            <a:ext cx="3383280" cy="694944"/>
+          </a:xfrm>
+          <a:prstGeom prst="rect">
+            <a:avLst/>
+          </a:prstGeom>
+          <a:noFill/>
+        </p:spPr>
+        <p:txBody>
+          <a:bodyPr wrap="square">
+            <a:spAutoFit/>
+          </a:bodyPr>
+          <a:lstStyle/>
+          <a:p>
+            <a:pPr algn="l"/>
+            <a:r>
+              <a:rPr sz="1200" b="0" i="0">
+                <a:solidFill>
+                  <a:srgbClr val="F0E6D3"/>
+                </a:solidFill>
+              </a:rPr>
+              <a:t>□ 物件契約・内装業者選定</a:t>
+            </a:r>
+          </a:p>
+        </p:txBody>
+      </p:sp>
+      <p:sp>
+        <p:nvSpPr>
+          <p:cNvPr id="22" name="TextBox 21"/>
+          <p:cNvSpPr txBox="1"/>
+          <p:nvPr/>
+        </p:nvSpPr>
+        <p:spPr>
+          <a:xfrm>
+            <a:off x="4480560" y="4389120"/>
+            <a:ext cx="3383280" cy="694944"/>
+          </a:xfrm>
+          <a:prstGeom prst="rect">
+            <a:avLst/>
+          </a:prstGeom>
+          <a:noFill/>
+        </p:spPr>
+        <p:txBody>
+          <a:bodyPr wrap="square">
+            <a:spAutoFit/>
+          </a:bodyPr>
+          <a:lstStyle/>
+          <a:p>
+            <a:pPr algn="l"/>
+            <a:r>
+              <a:rPr sz="1200" b="0" i="0">
+                <a:solidFill>
+                  <a:srgbClr val="F0E6D3"/>
+                </a:solidFill>
+              </a:rPr>
+              <a:t>□ インフルエンサーリスト作成（50名）</a:t>
+            </a:r>
+          </a:p>
+        </p:txBody>
+      </p:sp>
+      <p:sp>
+        <p:nvSpPr>
+          <p:cNvPr id="23" name="TextBox 22"/>
+          <p:cNvSpPr txBox="1"/>
+          <p:nvPr/>
+        </p:nvSpPr>
+        <p:spPr>
+          <a:xfrm>
+            <a:off x="4480560" y="5157216"/>
+            <a:ext cx="3383280" cy="694944"/>
+          </a:xfrm>
+          <a:prstGeom prst="rect">
+            <a:avLst/>
+          </a:prstGeom>
+          <a:noFill/>
+        </p:spPr>
+        <p:txBody>
+          <a:bodyPr wrap="square">
+            <a:spAutoFit/>
+          </a:bodyPr>
+          <a:lstStyle/>
+          <a:p>
+            <a:pPr algn="l"/>
+            <a:r>
+              <a:rPr sz="1200" b="0" i="0">
+                <a:solidFill>
+                  <a:srgbClr val="F0E6D3"/>
+                </a:solidFill>
+              </a:rPr>
+              <a:t>□ メニュー最終試作・原価計算確定</a:t>
+            </a:r>
+          </a:p>
+        </p:txBody>
+      </p:sp>
+      <p:sp>
+        <p:nvSpPr>
+          <p:cNvPr id="24" name="Rectangle 23"/>
+          <p:cNvSpPr/>
+          <p:nvPr/>
+        </p:nvSpPr>
+        <p:spPr>
+          <a:xfrm>
+            <a:off x="8229600" y="1600200"/>
+            <a:ext cx="3657600" cy="384048"/>
+          </a:xfrm>
+          <a:prstGeom prst="rect">
+            <a:avLst/>
+          </a:prstGeom>
+          <a:solidFill>
+            <a:srgbClr val="3A2E08"/>
+          </a:solidFill>
+          <a:ln>
+            <a:noFill/>
+          </a:ln>
+        </p:spPr>
+        <p:style>
+          <a:lnRef idx="1">
+            <a:schemeClr val="accent1"/>
+          </a:lnRef>
+          <a:fillRef idx="3">
+            <a:schemeClr val="accent1"/>
+          </a:fillRef>
+          <a:effectRef idx="2">
+            <a:schemeClr val="accent1"/>
+          </a:effectRef>
+          <a:fontRef idx="minor">
+            <a:schemeClr val="lt1"/>
+          </a:fontRef>
+        </p:style>
+        <p:txBody>
+          <a:bodyPr rtlCol="0" anchor="ctr"/>
+          <a:lstStyle/>
+          <a:p>
+            <a:pPr algn="ctr"/>
+          </a:p>
+        </p:txBody>
+      </p:sp>
+      <p:sp>
+        <p:nvSpPr>
+          <p:cNvPr id="25" name="TextBox 24"/>
+          <p:cNvSpPr txBox="1"/>
+          <p:nvPr/>
+        </p:nvSpPr>
+        <p:spPr>
+          <a:xfrm>
+            <a:off x="8321040" y="1627632"/>
+            <a:ext cx="1371600" cy="329184"/>
+          </a:xfrm>
+          <a:prstGeom prst="rect">
+            <a:avLst/>
+          </a:prstGeom>
+          <a:noFill/>
+        </p:spPr>
+        <p:txBody>
+          <a:bodyPr wrap="square">
+            <a:spAutoFit/>
+          </a:bodyPr>
+          <a:lstStyle/>
+          <a:p>
+            <a:pPr algn="l"/>
+            <a:r>
+              <a:rPr sz="1200" b="1" i="0">
+                <a:solidFill>
+                  <a:srgbClr val="C8963C"/>
+                </a:solidFill>
+              </a:rPr>
+              <a:t>60〜90日</a:t>
+            </a:r>
+          </a:p>
+        </p:txBody>
+      </p:sp>
+      <p:sp>
+        <p:nvSpPr>
+          <p:cNvPr id="26" name="TextBox 25"/>
+          <p:cNvSpPr txBox="1"/>
+          <p:nvPr/>
+        </p:nvSpPr>
+        <p:spPr>
+          <a:xfrm>
+            <a:off x="9692640" y="1627632"/>
+            <a:ext cx="2011680" cy="329184"/>
+          </a:xfrm>
+          <a:prstGeom prst="rect">
+            <a:avLst/>
+          </a:prstGeom>
+          <a:noFill/>
+        </p:spPr>
+        <p:txBody>
+          <a:bodyPr wrap="square">
+            <a:spAutoFit/>
+          </a:bodyPr>
+          <a:lstStyle/>
+          <a:p>
+            <a:pPr algn="l"/>
+            <a:r>
+              <a:rPr sz="1100" b="0" i="0">
+                <a:solidFill>
+                  <a:srgbClr val="FFFFFF"/>
+                </a:solidFill>
+              </a:rPr>
+              <a:t>着工と認知獲得</a:t>
+            </a:r>
+          </a:p>
+        </p:txBody>
+      </p:sp>
+      <p:sp>
+        <p:nvSpPr>
+          <p:cNvPr id="27" name="Rectangle 26"/>
+          <p:cNvSpPr/>
+          <p:nvPr/>
+        </p:nvSpPr>
+        <p:spPr>
+          <a:xfrm>
+            <a:off x="8229600" y="1984248"/>
+            <a:ext cx="3657600" cy="4206240"/>
+          </a:xfrm>
+          <a:prstGeom prst="rect">
+            <a:avLst/>
+          </a:prstGeom>
+          <a:solidFill>
+            <a:srgbClr val="2A1E12"/>
+          </a:solidFill>
+          <a:ln>
+            <a:noFill/>
+          </a:ln>
+        </p:spPr>
+        <p:style>
+          <a:lnRef idx="1">
+            <a:schemeClr val="accent1"/>
+          </a:lnRef>
+          <a:fillRef idx="3">
+            <a:schemeClr val="accent1"/>
+          </a:fillRef>
+          <a:effectRef idx="2">
+            <a:schemeClr val="accent1"/>
+          </a:effectRef>
+          <a:fontRef idx="minor">
+            <a:schemeClr val="lt1"/>
+          </a:fontRef>
+        </p:style>
+        <p:txBody>
+          <a:bodyPr rtlCol="0" anchor="ctr"/>
+          <a:lstStyle/>
+          <a:p>
+            <a:pPr algn="ctr"/>
+          </a:p>
+        </p:txBody>
+      </p:sp>
+      <p:sp>
+        <p:nvSpPr>
+          <p:cNvPr id="28" name="TextBox 27"/>
+          <p:cNvSpPr txBox="1"/>
+          <p:nvPr/>
+        </p:nvSpPr>
+        <p:spPr>
+          <a:xfrm>
+            <a:off x="8366760" y="2084831"/>
+            <a:ext cx="3383280" cy="694944"/>
+          </a:xfrm>
+          <a:prstGeom prst="rect">
+            <a:avLst/>
+          </a:prstGeom>
+          <a:noFill/>
+        </p:spPr>
+        <p:txBody>
+          <a:bodyPr wrap="square">
+            <a:spAutoFit/>
+          </a:bodyPr>
+          <a:lstStyle/>
+          <a:p>
+            <a:pPr algn="l"/>
+            <a:r>
+              <a:rPr sz="1200" b="0" i="0">
+                <a:solidFill>
+                  <a:srgbClr val="F0E6D3"/>
+                </a:solidFill>
+              </a:rPr>
+              <a:t>□ 内装・厨房工事着工</a:t>
+            </a:r>
+          </a:p>
+        </p:txBody>
+      </p:sp>
+      <p:sp>
+        <p:nvSpPr>
+          <p:cNvPr id="29" name="TextBox 28"/>
+          <p:cNvSpPr txBox="1"/>
+          <p:nvPr/>
+        </p:nvSpPr>
+        <p:spPr>
+          <a:xfrm>
+            <a:off x="8366760" y="2852927"/>
+            <a:ext cx="3383280" cy="694944"/>
+          </a:xfrm>
+          <a:prstGeom prst="rect">
+            <a:avLst/>
+          </a:prstGeom>
+          <a:noFill/>
+        </p:spPr>
+        <p:txBody>
+          <a:bodyPr wrap="square">
+            <a:spAutoFit/>
+          </a:bodyPr>
+          <a:lstStyle/>
+          <a:p>
+            <a:pPr algn="l"/>
+            <a:r>
+              <a:rPr sz="1200" b="0" i="0">
+                <a:solidFill>
+                  <a:srgbClr val="F0E6D3"/>
+                </a:solidFill>
+              </a:rPr>
+              <a:t>□ スタッフ採用開始</a:t>
+            </a:r>
+          </a:p>
+        </p:txBody>
+      </p:sp>
+      <p:sp>
+        <p:nvSpPr>
+          <p:cNvPr id="30" name="TextBox 29"/>
+          <p:cNvSpPr txBox="1"/>
+          <p:nvPr/>
+        </p:nvSpPr>
+        <p:spPr>
+          <a:xfrm>
+            <a:off x="8366760" y="3621024"/>
+            <a:ext cx="3383280" cy="694944"/>
+          </a:xfrm>
+          <a:prstGeom prst="rect">
+            <a:avLst/>
+          </a:prstGeom>
+          <a:noFill/>
+        </p:spPr>
+        <p:txBody>
+          <a:bodyPr wrap="square">
+            <a:spAutoFit/>
+          </a:bodyPr>
+          <a:lstStyle/>
+          <a:p>
+            <a:pPr algn="l"/>
+            <a:r>
+              <a:rPr sz="1200" b="0" i="0">
+                <a:solidFill>
+                  <a:srgbClr val="F0E6D3"/>
+                </a:solidFill>
+              </a:rPr>
+              <a:t>□ インフルエンサー招待DM開始</a:t>
+            </a:r>
+          </a:p>
+        </p:txBody>
+      </p:sp>
+      <p:sp>
+        <p:nvSpPr>
+          <p:cNvPr id="31" name="TextBox 30"/>
+          <p:cNvSpPr txBox="1"/>
+          <p:nvPr/>
+        </p:nvSpPr>
+        <p:spPr>
+          <a:xfrm>
+            <a:off x="8366760" y="4389120"/>
+            <a:ext cx="3383280" cy="694944"/>
+          </a:xfrm>
+          <a:prstGeom prst="rect">
+            <a:avLst/>
+          </a:prstGeom>
+          <a:noFill/>
+        </p:spPr>
+        <p:txBody>
+          <a:bodyPr wrap="square">
+            <a:spAutoFit/>
+          </a:bodyPr>
+          <a:lstStyle/>
+          <a:p>
+            <a:pPr algn="l"/>
+            <a:r>
+              <a:rPr sz="1200" b="0" i="0">
+                <a:solidFill>
+                  <a:srgbClr val="F0E6D3"/>
+                </a:solidFill>
+              </a:rPr>
+              <a:t>□ Googleビジネスプロフィール登録</a:t>
+            </a:r>
+          </a:p>
+        </p:txBody>
+      </p:sp>
+      <p:sp>
+        <p:nvSpPr>
+          <p:cNvPr id="32" name="TextBox 31"/>
+          <p:cNvSpPr txBox="1"/>
+          <p:nvPr/>
+        </p:nvSpPr>
+        <p:spPr>
+          <a:xfrm>
+            <a:off x="8366760" y="5157216"/>
+            <a:ext cx="3383280" cy="694944"/>
+          </a:xfrm>
+          <a:prstGeom prst="rect">
+            <a:avLst/>
+          </a:prstGeom>
+          <a:noFill/>
+        </p:spPr>
+        <p:txBody>
+          <a:bodyPr wrap="square">
+            <a:spAutoFit/>
+          </a:bodyPr>
+          <a:lstStyle/>
+          <a:p>
+            <a:pPr algn="l"/>
+            <a:r>
+              <a:rPr sz="1200" b="0" i="0">
+                <a:solidFill>
+                  <a:srgbClr val="F0E6D3"/>
+                </a:solidFill>
+              </a:rPr>
+              <a:t>□ POSシステム・決済端末導入</a:t>
+            </a:r>
+          </a:p>
+        </p:txBody>
+      </p:sp>
+      <p:sp>
+        <p:nvSpPr>
+          <p:cNvPr id="33" name="Rectangle 32"/>
+          <p:cNvSpPr/>
+          <p:nvPr/>
+        </p:nvSpPr>
+        <p:spPr>
+          <a:xfrm>
+            <a:off x="457200" y="6400800"/>
+            <a:ext cx="11247120" cy="347472"/>
+          </a:xfrm>
+          <a:prstGeom prst="rect">
+            <a:avLst/>
+          </a:prstGeom>
+          <a:solidFill>
+            <a:srgbClr val="3A2A08"/>
+          </a:solidFill>
+          <a:ln>
+            <a:noFill/>
+          </a:ln>
+        </p:spPr>
+        <p:style>
+          <a:lnRef idx="1">
+            <a:schemeClr val="accent1"/>
+          </a:lnRef>
+          <a:fillRef idx="3">
+            <a:schemeClr val="accent1"/>
+          </a:fillRef>
+          <a:effectRef idx="2">
+            <a:schemeClr val="accent1"/>
+          </a:effectRef>
+          <a:fontRef idx="minor">
+            <a:schemeClr val="lt1"/>
+          </a:fontRef>
+        </p:style>
+        <p:txBody>
+          <a:bodyPr rtlCol="0" anchor="ctr"/>
+          <a:lstStyle/>
+          <a:p>
+            <a:pPr algn="ctr"/>
+          </a:p>
+        </p:txBody>
+      </p:sp>
+      <p:sp>
+        <p:nvSpPr>
+          <p:cNvPr id="34" name="TextBox 33"/>
+          <p:cNvSpPr txBox="1"/>
+          <p:nvPr/>
+        </p:nvSpPr>
+        <p:spPr>
+          <a:xfrm>
+            <a:off x="457200" y="6428232"/>
+            <a:ext cx="11247120" cy="292608"/>
+          </a:xfrm>
+          <a:prstGeom prst="rect">
+            <a:avLst/>
+          </a:prstGeom>
+          <a:noFill/>
+        </p:spPr>
+        <p:txBody>
+          <a:bodyPr wrap="square">
+            <a:spAutoFit/>
+          </a:bodyPr>
+          <a:lstStyle/>
+          <a:p>
+            <a:pPr algn="ctr"/>
+            <a:r>
+              <a:rPr sz="1300" b="1" i="0">
+                <a:solidFill>
+                  <a:srgbClr val="C8963C"/>
+                </a:solidFill>
+              </a:rPr>
+              <a:t>90日後のゴール：物件契約完了・融資確定・SNS認知スタート　→　開業へ</a:t>
+            </a:r>
+          </a:p>
+        </p:txBody>
+      </p:sp>
+      <p:sp>
+        <p:nvSpPr>
+          <p:cNvPr id="35" name="TextBox 34"/>
+          <p:cNvSpPr txBox="1"/>
+          <p:nvPr/>
+        </p:nvSpPr>
+        <p:spPr>
+          <a:xfrm>
+            <a:off x="11430000" y="6492240"/>
+            <a:ext cx="731520" cy="274320"/>
+          </a:xfrm>
+          <a:prstGeom prst="rect">
+            <a:avLst/>
+          </a:prstGeom>
+          <a:noFill/>
+        </p:spPr>
+        <p:txBody>
+          <a:bodyPr wrap="square">
+            <a:spAutoFit/>
+          </a:bodyPr>
+          <a:lstStyle/>
+          <a:p>
+            <a:pPr algn="r"/>
+            <a:r>
+              <a:rPr sz="900" b="0" i="0">
+                <a:solidFill>
+                  <a:srgbClr val="8A7A6A"/>
+                </a:solidFill>
+              </a:rPr>
+              <a:t>20 / 21</a:t>
+            </a:r>
+          </a:p>
+        </p:txBody>
+      </p:sp>
+    </p:spTree>
+  </p:cSld>
+  <p:clrMapOvr>
+    <a:masterClrMapping/>
+  </p:clrMapOvr>
+</p:sld>
+</file>
+
+<file path=ppt/slides/slide21.xml><?xml version="1.0" encoding="utf-8"?>
+<p:sld xmlns:a="http://schemas.openxmlformats.org/drawingml/2006/main" xmlns:p="http://schemas.openxmlformats.org/presentationml/2006/main" xmlns:r="http://schemas.openxmlformats.org/officeDocument/2006/relationships">
+  <p:cSld>
+    <p:bg>
+      <p:bgPr>
+        <a:solidFill>
+          <a:srgbClr val="1A120B"/>
+        </a:solidFill>
+        <a:effectLst/>
+      </p:bgPr>
+    </p:bg>
+    <p:spTree>
+      <p:nvGrpSpPr>
+        <p:cNvPr id="1" name=""/>
+        <p:cNvGrpSpPr/>
+        <p:nvPr/>
+      </p:nvGrpSpPr>
+      <p:grpSpPr/>
+      <p:sp>
+        <p:nvSpPr>
+          <p:cNvPr id="2" name="Rectangle 1"/>
+          <p:cNvSpPr/>
+          <p:nvPr/>
+        </p:nvSpPr>
+        <p:spPr>
+          <a:xfrm>
+            <a:off x="0" y="0"/>
+            <a:ext cx="228600" cy="6858000"/>
+          </a:xfrm>
+          <a:prstGeom prst="rect">
+            <a:avLst/>
+          </a:prstGeom>
+          <a:solidFill>
+            <a:srgbClr val="C8963C"/>
+          </a:solidFill>
+          <a:ln>
+            <a:noFill/>
+          </a:ln>
+        </p:spPr>
+        <p:style>
+          <a:lnRef idx="1">
+            <a:schemeClr val="accent1"/>
+          </a:lnRef>
+          <a:fillRef idx="3">
+            <a:schemeClr val="accent1"/>
+          </a:fillRef>
+          <a:effectRef idx="2">
+            <a:schemeClr val="accent1"/>
+          </a:effectRef>
+          <a:fontRef idx="minor">
+            <a:schemeClr val="lt1"/>
+          </a:fontRef>
+        </p:style>
+        <p:txBody>
+          <a:bodyPr rtlCol="0" anchor="ctr"/>
+          <a:lstStyle/>
+          <a:p>
+            <a:pPr algn="ctr"/>
+          </a:p>
+        </p:txBody>
+      </p:sp>
+      <p:sp>
+        <p:nvSpPr>
+          <p:cNvPr id="3" name="TextBox 2"/>
+          <p:cNvSpPr txBox="1"/>
+          <p:nvPr/>
+        </p:nvSpPr>
+        <p:spPr>
+          <a:xfrm>
+            <a:off x="6858000" y="182880"/>
+            <a:ext cx="5029200" cy="5943600"/>
+          </a:xfrm>
+          <a:prstGeom prst="rect">
+            <a:avLst/>
+          </a:prstGeom>
+          <a:noFill/>
+        </p:spPr>
+        <p:txBody>
+          <a:bodyPr wrap="square">
+            <a:spAutoFit/>
+          </a:bodyPr>
+          <a:lstStyle/>
+          <a:p>
+            <a:pPr algn="ctr"/>
+            <a:r>
+              <a:rPr sz="28000" b="1" i="0">
+                <a:solidFill>
+                  <a:srgbClr val="2A1E12"/>
+                </a:solidFill>
+              </a:rPr>
+              <a:t>然</a:t>
+            </a:r>
+          </a:p>
+        </p:txBody>
+      </p:sp>
+      <p:sp>
+        <p:nvSpPr>
+          <p:cNvPr id="4" name="TextBox 3"/>
+          <p:cNvSpPr txBox="1"/>
+          <p:nvPr/>
+        </p:nvSpPr>
+        <p:spPr>
+          <a:xfrm>
+            <a:off x="731520" y="1097280"/>
+            <a:ext cx="5943600" cy="548640"/>
+          </a:xfrm>
+          <a:prstGeom prst="rect">
+            <a:avLst/>
+          </a:prstGeom>
+          <a:noFill/>
+        </p:spPr>
+        <p:txBody>
+          <a:bodyPr wrap="square">
+            <a:spAutoFit/>
+          </a:bodyPr>
+          <a:lstStyle/>
+          <a:p>
+            <a:pPr algn="l"/>
+            <a:r>
+              <a:rPr sz="1600" b="1" i="0">
+                <a:solidFill>
+                  <a:srgbClr val="C8963C"/>
+                </a:solidFill>
+              </a:rPr>
+              <a:t>私たちが目指す未来</a:t>
+            </a:r>
+          </a:p>
+        </p:txBody>
+      </p:sp>
+      <p:sp>
+        <p:nvSpPr>
+          <p:cNvPr id="5" name="Rectangle 4"/>
+          <p:cNvSpPr/>
+          <p:nvPr/>
+        </p:nvSpPr>
+        <p:spPr>
+          <a:xfrm>
+            <a:off x="731520" y="1691640"/>
+            <a:ext cx="5029200" cy="19050"/>
+          </a:xfrm>
+          <a:prstGeom prst="rect">
+            <a:avLst/>
+          </a:prstGeom>
+          <a:solidFill>
+            <a:srgbClr val="C8963C"/>
+          </a:solidFill>
+          <a:ln>
+            <a:noFill/>
+          </a:ln>
+        </p:spPr>
+        <p:style>
+          <a:lnRef idx="1">
+            <a:schemeClr val="accent1"/>
+          </a:lnRef>
+          <a:fillRef idx="3">
+            <a:schemeClr val="accent1"/>
+          </a:fillRef>
+          <a:effectRef idx="2">
+            <a:schemeClr val="accent1"/>
+          </a:effectRef>
+          <a:fontRef idx="minor">
+            <a:schemeClr val="lt1"/>
+          </a:fontRef>
+        </p:style>
+        <p:txBody>
+          <a:bodyPr rtlCol="0" anchor="ctr"/>
+          <a:lstStyle/>
+          <a:p>
+            <a:pPr algn="ctr"/>
+          </a:p>
+        </p:txBody>
+      </p:sp>
+      <p:sp>
+        <p:nvSpPr>
           <p:cNvPr id="6" name="TextBox 5"/>
           <p:cNvSpPr txBox="1"/>
           <p:nvPr/>
@@ -21021,7 +21786,7 @@
                   <a:srgbClr val="8A7A6A"/>
                 </a:solidFill>
               </a:rPr>
-              <a:t>19 / 20</a:t>
+              <a:t>19 / 21</a:t>
             </a:r>
           </a:p>
         </p:txBody>
@@ -21707,7 +22472,7 @@
                   <a:srgbClr val="8A7A6A"/>
                 </a:solidFill>
               </a:rPr>
-              <a:t>3 / 20</a:t>
+              <a:t>3 / 21</a:t>
             </a:r>
           </a:p>
         </p:txBody>
@@ -22512,7 +23277,7 @@
                   <a:srgbClr val="8A7A6A"/>
                 </a:solidFill>
               </a:rPr>
-              <a:t>4 / 20</a:t>
+              <a:t>4 / 21</a:t>
             </a:r>
           </a:p>
         </p:txBody>
@@ -23636,7 +24401,7 @@
                   <a:srgbClr val="8A7A6A"/>
                 </a:solidFill>
               </a:rPr>
-              <a:t>5 / 20</a:t>
+              <a:t>5 / 21</a:t>
             </a:r>
           </a:p>
         </p:txBody>
@@ -25613,7 +26378,7 @@
                   <a:srgbClr val="8A7A6A"/>
                 </a:solidFill>
               </a:rPr>
-              <a:t>6 / 20</a:t>
+              <a:t>6 / 21</a:t>
             </a:r>
           </a:p>
         </p:txBody>
@@ -26691,7 +27456,7 @@
                   <a:srgbClr val="8A7A6A"/>
                 </a:solidFill>
               </a:rPr>
-              <a:t>7 / 20</a:t>
+              <a:t>7 / 21</a:t>
             </a:r>
           </a:p>
         </p:txBody>
@@ -29463,7 +30228,7 @@
                   <a:srgbClr val="8A7A6A"/>
                 </a:solidFill>
               </a:rPr>
-              <a:t>8 / 20</a:t>
+              <a:t>8 / 21</a:t>
             </a:r>
           </a:p>
         </p:txBody>
@@ -31358,7 +32123,7 @@
                   <a:srgbClr val="8A7A6A"/>
                 </a:solidFill>
               </a:rPr>
-              <a:t>9 / 20</a:t>
+              <a:t>9 / 21</a:t>
             </a:r>
           </a:p>
         </p:txBody>

--- a/reports/肉酒場然_事業計画書_20260605.pptx
+++ b/reports/肉酒場然_事業計画書_20260605.pptx
@@ -17918,7 +17918,7 @@
                   <a:srgbClr val="C8963C"/>
                 </a:solidFill>
               </a:rPr>
-              <a:t>26億円</a:t>
+              <a:t>約13億円</a:t>
             </a:r>
           </a:p>
         </p:txBody>
@@ -18029,7 +18029,7 @@
                   <a:srgbClr val="C8963C"/>
                 </a:solidFill>
               </a:rPr>
-              <a:t>約648億円</a:t>
+              <a:t>約325億円</a:t>
             </a:r>
           </a:p>
         </p:txBody>

--- a/reports/肉酒場然_事業計画書_20260605.pptx
+++ b/reports/肉酒場然_事業計画書_20260605.pptx
@@ -6120,7 +6120,7 @@
                   <a:srgbClr val="1A120B"/>
                 </a:solidFill>
               </a:rPr>
-              <a:t>ストック収益　Year2〜</a:t>
+              <a:t>事業部化　Year3〜</a:t>
             </a:r>
           </a:p>
         </p:txBody>
@@ -6154,8 +6154,7 @@
                   <a:srgbClr val="FFFFFF"/>
                 </a:solidFill>
               </a:rPr>
-              <a:t>SNS・デザイン
-コンサル</a:t>
+              <a:t>SNS事業部</a:t>
             </a:r>
           </a:p>
         </p:txBody>
@@ -6232,9 +6231,10 @@
                   <a:srgbClr val="F0E6D3"/>
                 </a:solidFill>
               </a:rPr>
-              <a:t>然ブランドで培ったSNS戦略・
-インフルエンサー設計・店舗VI制作を
-他飲食企業に提供するコンサル事業。</a:t>
+              <a:t>3年目に事業部として独立。
+SNSコンサルティングと
+クリエイティブ制作を軸に
+飲食業界特化で展開。</a:t>
             </a:r>
           </a:p>
         </p:txBody>
@@ -6456,7 +6456,7 @@
                   <a:srgbClr val="C8963C"/>
                 </a:solidFill>
               </a:rPr>
-              <a:t>約101億円</a:t>
+              <a:t>約103億円</a:t>
             </a:r>
           </a:p>
         </p:txBody>
@@ -19071,7 +19071,7 @@
                   <a:srgbClr val="FFFFFF"/>
                 </a:solidFill>
               </a:rPr>
-              <a:t>本部経費・商標料　――　スケールと共に整備する</a:t>
+              <a:t>本部経費・賞与引当　――　スケールと共に整備する</a:t>
             </a:r>
           </a:p>
         </p:txBody>
@@ -20086,7 +20086,7 @@
                   <a:srgbClr val="C8963C"/>
                 </a:solidFill>
               </a:rPr>
-              <a:t>商標料・システム料（売上の1%）</a:t>
+              <a:t>賞与引当（売上の1%相当）</a:t>
             </a:r>
           </a:p>
         </p:txBody>
@@ -20202,7 +20202,7 @@
                   <a:srgbClr val="1A120B"/>
                 </a:solidFill>
               </a:rPr>
-              <a:t>7年目 商標料・システム料収入</a:t>
+              <a:t>7年目 賞与引当総額</a:t>
             </a:r>
           </a:p>
         </p:txBody>
@@ -20270,7 +20270,7 @@
                   <a:srgbClr val="F0E6D3"/>
                 </a:solidFill>
               </a:rPr>
-              <a:t>本部収益＝FC加盟金＋ロイヤリティ（3%）＋商標料（1%）
+              <a:t>賞与引当は売上1%で毎月積立。社員・バイトへの賞与原資として管理。
 → 100店舗時、本部だけで年商ベース約35億円規模のグループ収入</a:t>
             </a:r>
           </a:p>
@@ -20348,7 +20348,7 @@
                   <a:srgbClr val="C8963C"/>
                 </a:solidFill>
               </a:rPr>
-              <a:t>本部経費・商標料控除後の実効営業利益率：Year3〜9% / Year7〜12% / Year10〜13%（15%から約2〜3%下方修正）</a:t>
+              <a:t>本部経費・賞与引当控除後の実効営業利益率：Year3〜9% / Year7〜12% / Year10〜13%（15%から約2〜3%下方修正）</a:t>
             </a:r>
           </a:p>
         </p:txBody>
@@ -21025,7 +21025,7 @@
                   <a:srgbClr val="C8963C"/>
                 </a:solidFill>
               </a:rPr>
-              <a:t>101億円</a:t>
+              <a:t>103億円</a:t>
             </a:r>
           </a:p>
         </p:txBody>
@@ -21136,7 +21136,7 @@
                   <a:srgbClr val="C8963C"/>
                 </a:solidFill>
               </a:rPr>
-              <a:t>14.2億円</a:t>
+              <a:t>14.5億円</a:t>
             </a:r>
           </a:p>
         </p:txBody>
@@ -21358,7 +21358,7 @@
                   <a:srgbClr val="C8963C"/>
                 </a:solidFill>
               </a:rPr>
-              <a:t>197億円</a:t>
+              <a:t>205億円</a:t>
             </a:r>
           </a:p>
         </p:txBody>

--- a/reports/肉酒場然_事業計画書_20260605.pptx
+++ b/reports/肉酒場然_事業計画書_20260605.pptx
@@ -5742,7 +5742,7 @@
                   <a:srgbClr val="1A120B"/>
                 </a:solidFill>
               </a:rPr>
-              <a:t>1人OP特化　Year4〜</a:t>
+              <a:t>1人OP特化　Year4〜（構想中）</a:t>
             </a:r>
           </a:p>
         </p:txBody>
@@ -5853,9 +5853,10 @@
                   <a:srgbClr val="F0E6D3"/>
                 </a:solidFill>
               </a:rPr>
-              <a:t>1人〜2人で運営できる小型FC業態。
-低投資・高回転モデルで地方・郊外に展開。
-発酵×定食の然ノウハウを凝縮。</a:t>
+              <a:t>1人〜2人で完結する小型FC業態。
+ジャンル・コンセプトは現在設計中。
+然ブランドの運営ノウハウを凝縮し
+低投資・高回転モデルで展開予定。</a:t>
             </a:r>
           </a:p>
         </p:txBody>
@@ -21136,7 +21137,7 @@
                   <a:srgbClr val="C8963C"/>
                 </a:solidFill>
               </a:rPr>
-              <a:t>14.5億円</a:t>
+              <a:t>13.3億円</a:t>
             </a:r>
           </a:p>
         </p:txBody>
@@ -21247,7 +21248,7 @@
                   <a:srgbClr val="C8963C"/>
                 </a:solidFill>
               </a:rPr>
-              <a:t>14%</a:t>
+              <a:t>13%</a:t>
             </a:r>
           </a:p>
         </p:txBody>
@@ -26048,57 +26049,14 @@
       </p:sp>
       <p:sp>
         <p:nvSpPr>
-          <p:cNvPr id="19" name="Rectangle 18"/>
-          <p:cNvSpPr/>
-          <p:nvPr/>
-        </p:nvSpPr>
-        <p:spPr>
-          <a:xfrm>
-            <a:off x="6400800" y="1691640"/>
-            <a:ext cx="5486400" cy="4754880"/>
-          </a:xfrm>
-          <a:prstGeom prst="rect">
-            <a:avLst/>
-          </a:prstGeom>
-          <a:solidFill>
-            <a:srgbClr val="2A1E12"/>
-          </a:solidFill>
-          <a:ln>
-            <a:noFill/>
-          </a:ln>
-        </p:spPr>
-        <p:style>
-          <a:lnRef idx="1">
-            <a:schemeClr val="accent1"/>
-          </a:lnRef>
-          <a:fillRef idx="3">
-            <a:schemeClr val="accent1"/>
-          </a:fillRef>
-          <a:effectRef idx="2">
-            <a:schemeClr val="accent1"/>
-          </a:effectRef>
-          <a:fontRef idx="minor">
-            <a:schemeClr val="lt1"/>
-          </a:fontRef>
-        </p:style>
-        <p:txBody>
-          <a:bodyPr rtlCol="0" anchor="ctr"/>
-          <a:lstStyle/>
-          <a:p>
-            <a:pPr algn="ctr"/>
-          </a:p>
-        </p:txBody>
-      </p:sp>
-      <p:sp>
-        <p:nvSpPr>
-          <p:cNvPr id="20" name="TextBox 19"/>
-          <p:cNvSpPr txBox="1"/>
-          <p:nvPr/>
-        </p:nvSpPr>
-        <p:spPr>
-          <a:xfrm>
-            <a:off x="6537960" y="1828800"/>
-            <a:ext cx="5212080" cy="411480"/>
+          <p:cNvPr id="19" name="TextBox 18"/>
+          <p:cNvSpPr txBox="1"/>
+          <p:nvPr/>
+        </p:nvSpPr>
+        <p:spPr>
+          <a:xfrm>
+            <a:off x="6400800" y="1664208"/>
+            <a:ext cx="5486400" cy="411480"/>
           </a:xfrm>
           <a:prstGeom prst="rect">
             <a:avLst/>
@@ -26123,6 +26081,30 @@
           </a:p>
         </p:txBody>
       </p:sp>
+      <p:pic>
+        <p:nvPicPr>
+          <p:cNvPr id="20" name="Picture 19" descr="image.png"/>
+          <p:cNvPicPr>
+            <a:picLocks noChangeAspect="1"/>
+          </p:cNvPicPr>
+          <p:nvPr/>
+        </p:nvPicPr>
+        <p:blipFill>
+          <a:blip r:embed="rId2"/>
+          <a:stretch>
+            <a:fillRect/>
+          </a:stretch>
+        </p:blipFill>
+        <p:spPr>
+          <a:xfrm>
+            <a:off x="6400800" y="2103120"/>
+            <a:ext cx="5577840" cy="4389120"/>
+          </a:xfrm>
+          <a:prstGeom prst="rect">
+            <a:avLst/>
+          </a:prstGeom>
+        </p:spPr>
+      </p:pic>
       <p:sp>
         <p:nvSpPr>
           <p:cNvPr id="21" name="TextBox 20"/>
@@ -26131,72 +26113,28 @@
         </p:nvSpPr>
         <p:spPr>
           <a:xfrm>
-            <a:off x="6537960" y="2331720"/>
-            <a:ext cx="5212080" cy="3474720"/>
-          </a:xfrm>
-          <a:prstGeom prst="rect">
-            <a:avLst/>
-          </a:prstGeom>
-          <a:noFill/>
-        </p:spPr>
-        <p:txBody>
-          <a:bodyPr wrap="square">
-            <a:spAutoFit/>
-          </a:bodyPr>
-          <a:lstStyle/>
-          <a:p>
-            <a:pPr algn="l"/>
-            <a:r>
-              <a:rPr sz="1300" b="0" i="0">
-                <a:solidFill>
-                  <a:srgbClr val="F0E6D3"/>
-                </a:solidFill>
-              </a:rPr>
-              <a:t>       健康・発酵（高）
-            ↑
-   びゃく   │
-            │   ★肉酒場 然
-            │  （空白地帯）
-大衆──────┼──────── こだわり
- ひまり堂   │ なかよし
- つむぎ堂   │
-            ↓
-       健康・発酵（低）</a:t>
-            </a:r>
-          </a:p>
-        </p:txBody>
-      </p:sp>
-      <p:sp>
-        <p:nvSpPr>
-          <p:cNvPr id="22" name="TextBox 21"/>
-          <p:cNvSpPr txBox="1"/>
-          <p:nvPr/>
-        </p:nvSpPr>
-        <p:spPr>
-          <a:xfrm>
-            <a:off x="6537960" y="5806440"/>
-            <a:ext cx="5212080" cy="685800"/>
-          </a:xfrm>
-          <a:prstGeom prst="rect">
-            <a:avLst/>
-          </a:prstGeom>
-          <a:noFill/>
-        </p:spPr>
-        <p:txBody>
-          <a:bodyPr wrap="square">
-            <a:spAutoFit/>
-          </a:bodyPr>
-          <a:lstStyle/>
-          <a:p>
-            <a:pPr algn="l"/>
-            <a:r>
-              <a:rPr sz="1400" b="1" i="0">
+            <a:off x="6400800" y="6510528"/>
+            <a:ext cx="5577840" cy="320040"/>
+          </a:xfrm>
+          <a:prstGeom prst="rect">
+            <a:avLst/>
+          </a:prstGeom>
+          <a:noFill/>
+        </p:spPr>
+        <p:txBody>
+          <a:bodyPr wrap="square">
+            <a:spAutoFit/>
+          </a:bodyPr>
+          <a:lstStyle/>
+          <a:p>
+            <a:pPr algn="l"/>
+            <a:r>
+              <a:rPr sz="1300" b="1" i="0">
                 <a:solidFill>
                   <a:srgbClr val="C8963C"/>
                 </a:solidFill>
               </a:rPr>
-              <a:t>「健康・発酵 × 肉 × ランチ＆ディナー」
-は競合ゼロの完全空白地帯</a:t>
+              <a:t>「健康・発酵 × 肉 × ランチ＆ディナー」は競合ゼロの完全空白地帯</a:t>
             </a:r>
           </a:p>
         </p:txBody>
